--- a/Shifrovanie-izobrazhenij-na-Python-Ot-koda-k-pribyli.pptx
+++ b/Shifrovanie-izobrazhenij-na-Python-Ot-koda-k-pribyli.pptx
@@ -23,27 +23,20 @@
   <p:notesSz cx="8229600" cy="14630400"/>
   <p:embeddedFontLst>
     <p:embeddedFont>
-      <p:font typeface="Calibri" panose="020F0502020204030204" pitchFamily="34" charset="0"/>
+      <p:font typeface="Consolas" panose="020B0609020204030204" pitchFamily="49" charset="0"/>
       <p:regular r:id="rId13"/>
       <p:bold r:id="rId14"/>
       <p:italic r:id="rId15"/>
       <p:boldItalic r:id="rId16"/>
     </p:embeddedFont>
     <p:embeddedFont>
-      <p:font typeface="Consolas" panose="020B0609020204030204" pitchFamily="49" charset="0"/>
+      <p:font typeface="IBM Plex Sans Medium" panose="020F0502020204030204" pitchFamily="34" charset="0"/>
       <p:regular r:id="rId17"/>
-      <p:bold r:id="rId18"/>
-      <p:italic r:id="rId19"/>
-      <p:boldItalic r:id="rId20"/>
-    </p:embeddedFont>
-    <p:embeddedFont>
-      <p:font typeface="IBM Plex Sans Medium" panose="020B0603050203000203" pitchFamily="34" charset="0"/>
-      <p:regular r:id="rId21"/>
     </p:embeddedFont>
     <p:embeddedFont>
       <p:font typeface="Roboto" panose="02000000000000000000" pitchFamily="2" charset="0"/>
-      <p:regular r:id="rId22"/>
-      <p:bold r:id="rId23"/>
+      <p:regular r:id="rId18"/>
+      <p:bold r:id="rId19"/>
     </p:embeddedFont>
   </p:embeddedFontLst>
   <p:defaultTextStyle>
@@ -1362,6 +1355,13 @@
           </a:solidFill>
           <a:ln/>
         </p:spPr>
+        <p:txBody>
+          <a:bodyPr/>
+          <a:lstStyle/>
+          <a:p>
+            <a:endParaRPr lang="ru-RU"/>
+          </a:p>
+        </p:txBody>
       </p:sp>
       <p:sp>
         <p:nvSpPr>
@@ -1382,6 +1382,13 @@
           </a:solidFill>
           <a:ln/>
         </p:spPr>
+        <p:txBody>
+          <a:bodyPr/>
+          <a:lstStyle/>
+          <a:p>
+            <a:endParaRPr lang="ru-RU"/>
+          </a:p>
+        </p:txBody>
       </p:sp>
       <p:pic>
         <p:nvPicPr>
@@ -2471,6 +2478,60 @@
           </a:p>
         </p:txBody>
       </p:sp>
+      <p:sp>
+        <p:nvSpPr>
+          <p:cNvPr id="5" name="Прямоугольник 4">
+            <a:extLst>
+              <a:ext uri="{FF2B5EF4-FFF2-40B4-BE49-F238E27FC236}">
+                <a16:creationId xmlns:a16="http://schemas.microsoft.com/office/drawing/2014/main" id="{E4694042-B161-DCB2-0CA2-6E95E06BE70E}"/>
+              </a:ext>
+            </a:extLst>
+          </p:cNvPr>
+          <p:cNvSpPr/>
+          <p:nvPr/>
+        </p:nvSpPr>
+        <p:spPr>
+          <a:xfrm>
+            <a:off x="12417137" y="7242464"/>
+            <a:ext cx="2067791" cy="914400"/>
+          </a:xfrm>
+          <a:prstGeom prst="rect">
+            <a:avLst/>
+          </a:prstGeom>
+          <a:solidFill>
+            <a:srgbClr val="292C32"/>
+          </a:solidFill>
+          <a:ln>
+            <a:solidFill>
+              <a:srgbClr val="292C32"/>
+            </a:solidFill>
+          </a:ln>
+        </p:spPr>
+        <p:style>
+          <a:lnRef idx="2">
+            <a:schemeClr val="accent1">
+              <a:shade val="15000"/>
+            </a:schemeClr>
+          </a:lnRef>
+          <a:fillRef idx="1">
+            <a:schemeClr val="accent1"/>
+          </a:fillRef>
+          <a:effectRef idx="0">
+            <a:schemeClr val="accent1"/>
+          </a:effectRef>
+          <a:fontRef idx="minor">
+            <a:schemeClr val="lt1"/>
+          </a:fontRef>
+        </p:style>
+        <p:txBody>
+          <a:bodyPr rtlCol="0" anchor="ctr"/>
+          <a:lstStyle/>
+          <a:p>
+            <a:pPr algn="ctr"/>
+            <a:endParaRPr lang="ru-RU"/>
+          </a:p>
+        </p:txBody>
+      </p:sp>
     </p:spTree>
   </p:cSld>
   <p:clrMapOvr>
@@ -2538,6 +2599,60 @@
           </a:p>
         </p:txBody>
       </p:sp>
+      <p:sp>
+        <p:nvSpPr>
+          <p:cNvPr id="3" name="Прямоугольник 2">
+            <a:extLst>
+              <a:ext uri="{FF2B5EF4-FFF2-40B4-BE49-F238E27FC236}">
+                <a16:creationId xmlns:a16="http://schemas.microsoft.com/office/drawing/2014/main" id="{345C3CF4-F21A-97E4-C2EE-48FE099CB0A2}"/>
+              </a:ext>
+            </a:extLst>
+          </p:cNvPr>
+          <p:cNvSpPr/>
+          <p:nvPr/>
+        </p:nvSpPr>
+        <p:spPr>
+          <a:xfrm>
+            <a:off x="12827924" y="7731236"/>
+            <a:ext cx="1677785" cy="466758"/>
+          </a:xfrm>
+          <a:prstGeom prst="rect">
+            <a:avLst/>
+          </a:prstGeom>
+          <a:solidFill>
+            <a:srgbClr val="292C32"/>
+          </a:solidFill>
+          <a:ln>
+            <a:solidFill>
+              <a:srgbClr val="292C32"/>
+            </a:solidFill>
+          </a:ln>
+        </p:spPr>
+        <p:style>
+          <a:lnRef idx="2">
+            <a:schemeClr val="accent1">
+              <a:shade val="15000"/>
+            </a:schemeClr>
+          </a:lnRef>
+          <a:fillRef idx="1">
+            <a:schemeClr val="accent1"/>
+          </a:fillRef>
+          <a:effectRef idx="0">
+            <a:schemeClr val="accent1"/>
+          </a:effectRef>
+          <a:fontRef idx="minor">
+            <a:schemeClr val="lt1"/>
+          </a:fontRef>
+        </p:style>
+        <p:txBody>
+          <a:bodyPr rtlCol="0" anchor="ctr"/>
+          <a:lstStyle/>
+          <a:p>
+            <a:pPr algn="ctr"/>
+            <a:endParaRPr lang="ru-RU"/>
+          </a:p>
+        </p:txBody>
+      </p:sp>
     </p:spTree>
   </p:cSld>
   <p:clrMapOvr>
@@ -2713,6 +2828,60 @@
           </a:prstGeom>
         </p:spPr>
       </p:pic>
+      <p:sp>
+        <p:nvSpPr>
+          <p:cNvPr id="6" name="Прямоугольник 5">
+            <a:extLst>
+              <a:ext uri="{FF2B5EF4-FFF2-40B4-BE49-F238E27FC236}">
+                <a16:creationId xmlns:a16="http://schemas.microsoft.com/office/drawing/2014/main" id="{43C0FED1-FAC5-B305-AE2F-27109BD65525}"/>
+              </a:ext>
+            </a:extLst>
+          </p:cNvPr>
+          <p:cNvSpPr/>
+          <p:nvPr/>
+        </p:nvSpPr>
+        <p:spPr>
+          <a:xfrm>
+            <a:off x="12417137" y="7242464"/>
+            <a:ext cx="2067791" cy="914400"/>
+          </a:xfrm>
+          <a:prstGeom prst="rect">
+            <a:avLst/>
+          </a:prstGeom>
+          <a:solidFill>
+            <a:srgbClr val="292C32"/>
+          </a:solidFill>
+          <a:ln>
+            <a:solidFill>
+              <a:srgbClr val="292C32"/>
+            </a:solidFill>
+          </a:ln>
+        </p:spPr>
+        <p:style>
+          <a:lnRef idx="2">
+            <a:schemeClr val="accent1">
+              <a:shade val="15000"/>
+            </a:schemeClr>
+          </a:lnRef>
+          <a:fillRef idx="1">
+            <a:schemeClr val="accent1"/>
+          </a:fillRef>
+          <a:effectRef idx="0">
+            <a:schemeClr val="accent1"/>
+          </a:effectRef>
+          <a:fontRef idx="minor">
+            <a:schemeClr val="lt1"/>
+          </a:fontRef>
+        </p:style>
+        <p:txBody>
+          <a:bodyPr rtlCol="0" anchor="ctr"/>
+          <a:lstStyle/>
+          <a:p>
+            <a:pPr algn="ctr"/>
+            <a:endParaRPr lang="ru-RU"/>
+          </a:p>
+        </p:txBody>
+      </p:sp>
     </p:spTree>
   </p:cSld>
   <p:clrMapOvr>
@@ -2830,6 +2999,13 @@
             <a:prstDash val="solid"/>
           </a:ln>
         </p:spPr>
+        <p:txBody>
+          <a:bodyPr/>
+          <a:lstStyle/>
+          <a:p>
+            <a:endParaRPr lang="ru-RU"/>
+          </a:p>
+        </p:txBody>
       </p:sp>
       <p:sp>
         <p:nvSpPr>
@@ -2852,6 +3028,13 @@
           </a:solidFill>
           <a:ln/>
         </p:spPr>
+        <p:txBody>
+          <a:bodyPr/>
+          <a:lstStyle/>
+          <a:p>
+            <a:endParaRPr lang="ru-RU"/>
+          </a:p>
+        </p:txBody>
       </p:sp>
       <p:sp>
         <p:nvSpPr>
@@ -3006,6 +3189,13 @@
             <a:prstDash val="solid"/>
           </a:ln>
         </p:spPr>
+        <p:txBody>
+          <a:bodyPr/>
+          <a:lstStyle/>
+          <a:p>
+            <a:endParaRPr lang="ru-RU"/>
+          </a:p>
+        </p:txBody>
       </p:sp>
       <p:sp>
         <p:nvSpPr>
@@ -3028,6 +3218,13 @@
           </a:solidFill>
           <a:ln/>
         </p:spPr>
+        <p:txBody>
+          <a:bodyPr/>
+          <a:lstStyle/>
+          <a:p>
+            <a:endParaRPr lang="ru-RU"/>
+          </a:p>
+        </p:txBody>
       </p:sp>
       <p:sp>
         <p:nvSpPr>
@@ -3092,6 +3289,13 @@
           </a:solidFill>
           <a:ln/>
         </p:spPr>
+        <p:txBody>
+          <a:bodyPr/>
+          <a:lstStyle/>
+          <a:p>
+            <a:endParaRPr lang="ru-RU"/>
+          </a:p>
+        </p:txBody>
       </p:sp>
       <p:sp>
         <p:nvSpPr>
@@ -3114,6 +3318,13 @@
           </a:solidFill>
           <a:ln/>
         </p:spPr>
+        <p:txBody>
+          <a:bodyPr/>
+          <a:lstStyle/>
+          <a:p>
+            <a:endParaRPr lang="ru-RU"/>
+          </a:p>
+        </p:txBody>
       </p:sp>
       <p:sp>
         <p:nvSpPr>
@@ -3228,6 +3439,13 @@
             <a:prstDash val="solid"/>
           </a:ln>
         </p:spPr>
+        <p:txBody>
+          <a:bodyPr/>
+          <a:lstStyle/>
+          <a:p>
+            <a:endParaRPr lang="ru-RU"/>
+          </a:p>
+        </p:txBody>
       </p:sp>
       <p:sp>
         <p:nvSpPr>
@@ -3250,6 +3468,13 @@
           </a:solidFill>
           <a:ln/>
         </p:spPr>
+        <p:txBody>
+          <a:bodyPr/>
+          <a:lstStyle/>
+          <a:p>
+            <a:endParaRPr lang="ru-RU"/>
+          </a:p>
+        </p:txBody>
       </p:sp>
       <p:sp>
         <p:nvSpPr>
@@ -3332,6 +3557,60 @@
               <a:t>Обычный персональный компьютер или ноутбук без специальных требований к производительности</a:t>
             </a:r>
             <a:endParaRPr lang="en-US" sz="1450" dirty="0"/>
+          </a:p>
+        </p:txBody>
+      </p:sp>
+      <p:sp>
+        <p:nvSpPr>
+          <p:cNvPr id="19" name="Прямоугольник 18">
+            <a:extLst>
+              <a:ext uri="{FF2B5EF4-FFF2-40B4-BE49-F238E27FC236}">
+                <a16:creationId xmlns:a16="http://schemas.microsoft.com/office/drawing/2014/main" id="{59813607-F9DA-6DD3-1CD8-E72221E5A4BB}"/>
+              </a:ext>
+            </a:extLst>
+          </p:cNvPr>
+          <p:cNvSpPr/>
+          <p:nvPr/>
+        </p:nvSpPr>
+        <p:spPr>
+          <a:xfrm>
+            <a:off x="12827924" y="7731236"/>
+            <a:ext cx="1677785" cy="466758"/>
+          </a:xfrm>
+          <a:prstGeom prst="rect">
+            <a:avLst/>
+          </a:prstGeom>
+          <a:solidFill>
+            <a:srgbClr val="292C32"/>
+          </a:solidFill>
+          <a:ln>
+            <a:solidFill>
+              <a:srgbClr val="292C32"/>
+            </a:solidFill>
+          </a:ln>
+        </p:spPr>
+        <p:style>
+          <a:lnRef idx="2">
+            <a:schemeClr val="accent1">
+              <a:shade val="15000"/>
+            </a:schemeClr>
+          </a:lnRef>
+          <a:fillRef idx="1">
+            <a:schemeClr val="accent1"/>
+          </a:fillRef>
+          <a:effectRef idx="0">
+            <a:schemeClr val="accent1"/>
+          </a:effectRef>
+          <a:fontRef idx="minor">
+            <a:schemeClr val="lt1"/>
+          </a:fontRef>
+        </p:style>
+        <p:txBody>
+          <a:bodyPr rtlCol="0" anchor="ctr"/>
+          <a:lstStyle/>
+          <a:p>
+            <a:pPr algn="ctr"/>
+            <a:endParaRPr lang="ru-RU"/>
           </a:p>
         </p:txBody>
       </p:sp>
@@ -3814,6 +4093,13 @@
           </a:solidFill>
           <a:ln/>
         </p:spPr>
+        <p:txBody>
+          <a:bodyPr/>
+          <a:lstStyle/>
+          <a:p>
+            <a:endParaRPr lang="ru-RU"/>
+          </a:p>
+        </p:txBody>
       </p:sp>
       <p:pic>
         <p:nvPicPr>
@@ -3933,6 +4219,60 @@
               <a:t> и усилия на разработку и продвижение проекта</a:t>
             </a:r>
             <a:endParaRPr lang="en-US" sz="1500" dirty="0"/>
+          </a:p>
+        </p:txBody>
+      </p:sp>
+      <p:sp>
+        <p:nvSpPr>
+          <p:cNvPr id="16" name="Прямоугольник 15">
+            <a:extLst>
+              <a:ext uri="{FF2B5EF4-FFF2-40B4-BE49-F238E27FC236}">
+                <a16:creationId xmlns:a16="http://schemas.microsoft.com/office/drawing/2014/main" id="{BD4B7616-BC9E-FC7B-45F3-E6E06E384B42}"/>
+              </a:ext>
+            </a:extLst>
+          </p:cNvPr>
+          <p:cNvSpPr/>
+          <p:nvPr/>
+        </p:nvSpPr>
+        <p:spPr>
+          <a:xfrm>
+            <a:off x="12827924" y="7731236"/>
+            <a:ext cx="1677785" cy="466758"/>
+          </a:xfrm>
+          <a:prstGeom prst="rect">
+            <a:avLst/>
+          </a:prstGeom>
+          <a:solidFill>
+            <a:srgbClr val="292C32"/>
+          </a:solidFill>
+          <a:ln>
+            <a:solidFill>
+              <a:srgbClr val="292C32"/>
+            </a:solidFill>
+          </a:ln>
+        </p:spPr>
+        <p:style>
+          <a:lnRef idx="2">
+            <a:schemeClr val="accent1">
+              <a:shade val="15000"/>
+            </a:schemeClr>
+          </a:lnRef>
+          <a:fillRef idx="1">
+            <a:schemeClr val="accent1"/>
+          </a:fillRef>
+          <a:effectRef idx="0">
+            <a:schemeClr val="accent1"/>
+          </a:effectRef>
+          <a:fontRef idx="minor">
+            <a:schemeClr val="lt1"/>
+          </a:fontRef>
+        </p:style>
+        <p:txBody>
+          <a:bodyPr rtlCol="0" anchor="ctr"/>
+          <a:lstStyle/>
+          <a:p>
+            <a:pPr algn="ctr"/>
+            <a:endParaRPr lang="ru-RU"/>
           </a:p>
         </p:txBody>
       </p:sp>
@@ -4739,6 +5079,60 @@
           </a:p>
         </p:txBody>
       </p:sp>
+      <p:sp>
+        <p:nvSpPr>
+          <p:cNvPr id="19" name="Прямоугольник 18">
+            <a:extLst>
+              <a:ext uri="{FF2B5EF4-FFF2-40B4-BE49-F238E27FC236}">
+                <a16:creationId xmlns:a16="http://schemas.microsoft.com/office/drawing/2014/main" id="{80AA1A6B-B204-225A-C3F9-483914D7B28B}"/>
+              </a:ext>
+            </a:extLst>
+          </p:cNvPr>
+          <p:cNvSpPr/>
+          <p:nvPr/>
+        </p:nvSpPr>
+        <p:spPr>
+          <a:xfrm>
+            <a:off x="12827924" y="7731236"/>
+            <a:ext cx="1677785" cy="466758"/>
+          </a:xfrm>
+          <a:prstGeom prst="rect">
+            <a:avLst/>
+          </a:prstGeom>
+          <a:solidFill>
+            <a:srgbClr val="292C32"/>
+          </a:solidFill>
+          <a:ln>
+            <a:solidFill>
+              <a:srgbClr val="292C32"/>
+            </a:solidFill>
+          </a:ln>
+        </p:spPr>
+        <p:style>
+          <a:lnRef idx="2">
+            <a:schemeClr val="accent1">
+              <a:shade val="15000"/>
+            </a:schemeClr>
+          </a:lnRef>
+          <a:fillRef idx="1">
+            <a:schemeClr val="accent1"/>
+          </a:fillRef>
+          <a:effectRef idx="0">
+            <a:schemeClr val="accent1"/>
+          </a:effectRef>
+          <a:fontRef idx="minor">
+            <a:schemeClr val="lt1"/>
+          </a:fontRef>
+        </p:style>
+        <p:txBody>
+          <a:bodyPr rtlCol="0" anchor="ctr"/>
+          <a:lstStyle/>
+          <a:p>
+            <a:pPr algn="ctr"/>
+            <a:endParaRPr lang="ru-RU"/>
+          </a:p>
+        </p:txBody>
+      </p:sp>
     </p:spTree>
   </p:cSld>
   <p:clrMapOvr>
@@ -4815,7 +5209,121 @@
           <p:nvPr/>
         </p:nvPicPr>
         <p:blipFill>
-          <a:blip r:embed="rId3">
+          <a:blip>
+            <a:extLst>
+              <a:ext uri="{96DAC541-7B7A-43D3-8B79-37D633B846F1}">
+                <asvg:svgBlip xmlns:asvg="http://schemas.microsoft.com/office/drawing/2016/SVG/main" r:embed="rId3"/>
+              </a:ext>
+            </a:extLst>
+          </a:blip>
+          <a:stretch>
+            <a:fillRect/>
+          </a:stretch>
+        </p:blipFill>
+        <p:spPr>
+          <a:xfrm>
+            <a:off x="793790" y="2039541"/>
+            <a:ext cx="566976" cy="566976"/>
+          </a:xfrm>
+          <a:prstGeom prst="rect">
+            <a:avLst/>
+          </a:prstGeom>
+        </p:spPr>
+      </p:pic>
+      <p:sp>
+        <p:nvSpPr>
+          <p:cNvPr id="4" name="Text 1"/>
+          <p:cNvSpPr/>
+          <p:nvPr/>
+        </p:nvSpPr>
+        <p:spPr>
+          <a:xfrm>
+            <a:off x="793790" y="2890004"/>
+            <a:ext cx="3406735" cy="354330"/>
+          </a:xfrm>
+          <a:prstGeom prst="rect">
+            <a:avLst/>
+          </a:prstGeom>
+          <a:noFill/>
+          <a:ln/>
+        </p:spPr>
+        <p:txBody>
+          <a:bodyPr wrap="none" lIns="0" tIns="0" rIns="0" bIns="0" rtlCol="0" anchor="t"/>
+          <a:lstStyle/>
+          <a:p>
+            <a:pPr marL="0" indent="0" algn="l">
+              <a:lnSpc>
+                <a:spcPts val="2750"/>
+              </a:lnSpc>
+              <a:buNone/>
+            </a:pPr>
+            <a:r>
+              <a:rPr lang="en-US" sz="2200" dirty="0">
+                <a:solidFill>
+                  <a:srgbClr val="D4D4D1"/>
+                </a:solidFill>
+                <a:latin typeface="IBM Plex Sans Medium" pitchFamily="34" charset="0"/>
+                <a:ea typeface="IBM Plex Sans Medium" pitchFamily="34" charset="-122"/>
+                <a:cs typeface="IBM Plex Sans Medium" pitchFamily="34" charset="-120"/>
+              </a:rPr>
+              <a:t>Фотографы и дизайнеры</a:t>
+            </a:r>
+            <a:endParaRPr lang="en-US" sz="2200" dirty="0"/>
+          </a:p>
+        </p:txBody>
+      </p:sp>
+      <p:sp>
+        <p:nvSpPr>
+          <p:cNvPr id="5" name="Text 2"/>
+          <p:cNvSpPr/>
+          <p:nvPr/>
+        </p:nvSpPr>
+        <p:spPr>
+          <a:xfrm>
+            <a:off x="793790" y="3380423"/>
+            <a:ext cx="4158615" cy="1088708"/>
+          </a:xfrm>
+          <a:prstGeom prst="rect">
+            <a:avLst/>
+          </a:prstGeom>
+          <a:noFill/>
+          <a:ln/>
+        </p:spPr>
+        <p:txBody>
+          <a:bodyPr wrap="square" lIns="0" tIns="0" rIns="0" bIns="0" rtlCol="0" anchor="t"/>
+          <a:lstStyle/>
+          <a:p>
+            <a:pPr marL="0" indent="0" algn="l">
+              <a:lnSpc>
+                <a:spcPts val="2850"/>
+              </a:lnSpc>
+              <a:buNone/>
+            </a:pPr>
+            <a:r>
+              <a:rPr lang="en-US" sz="1750" dirty="0">
+                <a:solidFill>
+                  <a:srgbClr val="D4D4D1"/>
+                </a:solidFill>
+                <a:latin typeface="Roboto" pitchFamily="34" charset="0"/>
+                <a:ea typeface="Roboto" pitchFamily="34" charset="-122"/>
+                <a:cs typeface="Roboto" pitchFamily="34" charset="-120"/>
+              </a:rPr>
+              <a:t>Защита работ от несанкционированного использования и распространения</a:t>
+            </a:r>
+            <a:endParaRPr lang="en-US" sz="1750" dirty="0"/>
+          </a:p>
+        </p:txBody>
+      </p:sp>
+      <p:pic>
+        <p:nvPicPr>
+          <p:cNvPr id="6" name="Image 1" descr="preencoded.png"/>
+          <p:cNvPicPr>
+            <a:picLocks noChangeAspect="1"/>
+          </p:cNvPicPr>
+          <p:nvPr/>
+        </p:nvPicPr>
+        <p:blipFill>
+          <a:blip>
             <a:extLst>
               <a:ext uri="{96DAC541-7B7A-43D3-8B79-37D633B846F1}">
                 <asvg:svgBlip xmlns:asvg="http://schemas.microsoft.com/office/drawing/2016/SVG/main" r:embed="rId4"/>
@@ -4828,7 +5336,7 @@
         </p:blipFill>
         <p:spPr>
           <a:xfrm>
-            <a:off x="793790" y="2039541"/>
+            <a:off x="5235893" y="2039541"/>
             <a:ext cx="566976" cy="566976"/>
           </a:xfrm>
           <a:prstGeom prst="rect">
@@ -4838,14 +5346,14 @@
       </p:pic>
       <p:sp>
         <p:nvSpPr>
-          <p:cNvPr id="4" name="Text 1"/>
-          <p:cNvSpPr/>
-          <p:nvPr/>
-        </p:nvSpPr>
-        <p:spPr>
-          <a:xfrm>
-            <a:off x="793790" y="2890004"/>
-            <a:ext cx="3406735" cy="354330"/>
+          <p:cNvPr id="7" name="Text 3"/>
+          <p:cNvSpPr/>
+          <p:nvPr/>
+        </p:nvSpPr>
+        <p:spPr>
+          <a:xfrm>
+            <a:off x="5235893" y="2890004"/>
+            <a:ext cx="3114556" cy="354330"/>
           </a:xfrm>
           <a:prstGeom prst="rect">
             <a:avLst/>
@@ -4872,7 +5380,7 @@
                 <a:ea typeface="IBM Plex Sans Medium" pitchFamily="34" charset="-122"/>
                 <a:cs typeface="IBM Plex Sans Medium" pitchFamily="34" charset="-120"/>
               </a:rPr>
-              <a:t>Фотографы и дизайнеры</a:t>
+              <a:t>Частные пользователи</a:t>
             </a:r>
             <a:endParaRPr lang="en-US" sz="2200" dirty="0"/>
           </a:p>
@@ -4880,13 +5388,13 @@
       </p:sp>
       <p:sp>
         <p:nvSpPr>
-          <p:cNvPr id="5" name="Text 2"/>
-          <p:cNvSpPr/>
-          <p:nvPr/>
-        </p:nvSpPr>
-        <p:spPr>
-          <a:xfrm>
-            <a:off x="793790" y="3380423"/>
+          <p:cNvPr id="8" name="Text 4"/>
+          <p:cNvSpPr/>
+          <p:nvPr/>
+        </p:nvSpPr>
+        <p:spPr>
+          <a:xfrm>
+            <a:off x="5235893" y="3380423"/>
             <a:ext cx="4158615" cy="1088708"/>
           </a:xfrm>
           <a:prstGeom prst="rect">
@@ -4914,7 +5422,7 @@
                 <a:ea typeface="Roboto" pitchFamily="34" charset="-122"/>
                 <a:cs typeface="Roboto" pitchFamily="34" charset="-120"/>
               </a:rPr>
-              <a:t>Защита работ от несанкционированного использования и распространения</a:t>
+              <a:t>Защита личных фотографий, семейных архивов и конфиденциальных документов</a:t>
             </a:r>
             <a:endParaRPr lang="en-US" sz="1750" dirty="0"/>
           </a:p>
@@ -4922,14 +5430,14 @@
       </p:sp>
       <p:pic>
         <p:nvPicPr>
-          <p:cNvPr id="6" name="Image 1" descr="preencoded.png"/>
+          <p:cNvPr id="9" name="Image 2" descr="preencoded.png"/>
           <p:cNvPicPr>
             <a:picLocks noChangeAspect="1"/>
           </p:cNvPicPr>
           <p:nvPr/>
         </p:nvPicPr>
         <p:blipFill>
-          <a:blip r:embed="rId3">
+          <a:blip>
             <a:extLst>
               <a:ext uri="{96DAC541-7B7A-43D3-8B79-37D633B846F1}">
                 <asvg:svgBlip xmlns:asvg="http://schemas.microsoft.com/office/drawing/2016/SVG/main" r:embed="rId5"/>
@@ -4942,7 +5450,7 @@
         </p:blipFill>
         <p:spPr>
           <a:xfrm>
-            <a:off x="5235893" y="2039541"/>
+            <a:off x="9677995" y="2039541"/>
             <a:ext cx="566976" cy="566976"/>
           </a:xfrm>
           <a:prstGeom prst="rect">
@@ -4952,14 +5460,14 @@
       </p:pic>
       <p:sp>
         <p:nvSpPr>
-          <p:cNvPr id="7" name="Text 3"/>
-          <p:cNvSpPr/>
-          <p:nvPr/>
-        </p:nvSpPr>
-        <p:spPr>
-          <a:xfrm>
-            <a:off x="5235893" y="2890004"/>
-            <a:ext cx="3114556" cy="354330"/>
+          <p:cNvPr id="10" name="Text 5"/>
+          <p:cNvSpPr/>
+          <p:nvPr/>
+        </p:nvSpPr>
+        <p:spPr>
+          <a:xfrm>
+            <a:off x="9677995" y="2890004"/>
+            <a:ext cx="2835235" cy="354330"/>
           </a:xfrm>
           <a:prstGeom prst="rect">
             <a:avLst/>
@@ -4986,7 +5494,7 @@
                 <a:ea typeface="IBM Plex Sans Medium" pitchFamily="34" charset="-122"/>
                 <a:cs typeface="IBM Plex Sans Medium" pitchFamily="34" charset="-120"/>
               </a:rPr>
-              <a:t>Частные пользователи</a:t>
+              <a:t>Малый бизнес</a:t>
             </a:r>
             <a:endParaRPr lang="en-US" sz="2200" dirty="0"/>
           </a:p>
@@ -4994,13 +5502,13 @@
       </p:sp>
       <p:sp>
         <p:nvSpPr>
-          <p:cNvPr id="8" name="Text 4"/>
-          <p:cNvSpPr/>
-          <p:nvPr/>
-        </p:nvSpPr>
-        <p:spPr>
-          <a:xfrm>
-            <a:off x="5235893" y="3380423"/>
+          <p:cNvPr id="11" name="Text 6"/>
+          <p:cNvSpPr/>
+          <p:nvPr/>
+        </p:nvSpPr>
+        <p:spPr>
+          <a:xfrm>
+            <a:off x="9677995" y="3380423"/>
             <a:ext cx="4158615" cy="1088708"/>
           </a:xfrm>
           <a:prstGeom prst="rect">
@@ -5028,7 +5536,7 @@
                 <a:ea typeface="Roboto" pitchFamily="34" charset="-122"/>
                 <a:cs typeface="Roboto" pitchFamily="34" charset="-120"/>
               </a:rPr>
-              <a:t>Защита личных фотографий, семейных архивов и конфиденциальных документов</a:t>
+              <a:t>Защита изображений с коммерческой тайной и конфиденциальной информацией</a:t>
             </a:r>
             <a:endParaRPr lang="en-US" sz="1750" dirty="0"/>
           </a:p>
@@ -5036,14 +5544,14 @@
       </p:sp>
       <p:pic>
         <p:nvPicPr>
-          <p:cNvPr id="9" name="Image 2" descr="preencoded.png"/>
+          <p:cNvPr id="12" name="Image 3" descr="preencoded.png"/>
           <p:cNvPicPr>
             <a:picLocks noChangeAspect="1"/>
           </p:cNvPicPr>
           <p:nvPr/>
         </p:nvPicPr>
         <p:blipFill>
-          <a:blip r:embed="rId3">
+          <a:blip>
             <a:extLst>
               <a:ext uri="{96DAC541-7B7A-43D3-8B79-37D633B846F1}">
                 <asvg:svgBlip xmlns:asvg="http://schemas.microsoft.com/office/drawing/2016/SVG/main" r:embed="rId6"/>
@@ -5056,7 +5564,7 @@
         </p:blipFill>
         <p:spPr>
           <a:xfrm>
-            <a:off x="9677995" y="2039541"/>
+            <a:off x="793790" y="4922758"/>
             <a:ext cx="566976" cy="566976"/>
           </a:xfrm>
           <a:prstGeom prst="rect">
@@ -5066,14 +5574,14 @@
       </p:pic>
       <p:sp>
         <p:nvSpPr>
-          <p:cNvPr id="10" name="Text 5"/>
-          <p:cNvSpPr/>
-          <p:nvPr/>
-        </p:nvSpPr>
-        <p:spPr>
-          <a:xfrm>
-            <a:off x="9677995" y="2890004"/>
-            <a:ext cx="2835235" cy="354330"/>
+          <p:cNvPr id="13" name="Text 7"/>
+          <p:cNvSpPr/>
+          <p:nvPr/>
+        </p:nvSpPr>
+        <p:spPr>
+          <a:xfrm>
+            <a:off x="793790" y="5773222"/>
+            <a:ext cx="3667363" cy="354330"/>
           </a:xfrm>
           <a:prstGeom prst="rect">
             <a:avLst/>
@@ -5100,7 +5608,7 @@
                 <a:ea typeface="IBM Plex Sans Medium" pitchFamily="34" charset="-122"/>
                 <a:cs typeface="IBM Plex Sans Medium" pitchFamily="34" charset="-120"/>
               </a:rPr>
-              <a:t>Малый бизнес</a:t>
+              <a:t>Студенты и исследователи</a:t>
             </a:r>
             <a:endParaRPr lang="en-US" sz="2200" dirty="0"/>
           </a:p>
@@ -5108,13 +5616,13 @@
       </p:sp>
       <p:sp>
         <p:nvSpPr>
-          <p:cNvPr id="11" name="Text 6"/>
-          <p:cNvSpPr/>
-          <p:nvPr/>
-        </p:nvSpPr>
-        <p:spPr>
-          <a:xfrm>
-            <a:off x="9677995" y="3380423"/>
+          <p:cNvPr id="14" name="Text 8"/>
+          <p:cNvSpPr/>
+          <p:nvPr/>
+        </p:nvSpPr>
+        <p:spPr>
+          <a:xfrm>
+            <a:off x="793790" y="6263640"/>
             <a:ext cx="4158615" cy="1088708"/>
           </a:xfrm>
           <a:prstGeom prst="rect">
@@ -5142,7 +5650,7 @@
                 <a:ea typeface="Roboto" pitchFamily="34" charset="-122"/>
                 <a:cs typeface="Roboto" pitchFamily="34" charset="-120"/>
               </a:rPr>
-              <a:t>Защита изображений с коммерческой тайной и конфиденциальной информацией</a:t>
+              <a:t>Эксперименты с криптографией изображений и защита исследовательских данных</a:t>
             </a:r>
             <a:endParaRPr lang="en-US" sz="1750" dirty="0"/>
           </a:p>
@@ -5150,14 +5658,14 @@
       </p:sp>
       <p:pic>
         <p:nvPicPr>
-          <p:cNvPr id="12" name="Image 3" descr="preencoded.png"/>
+          <p:cNvPr id="15" name="Image 4" descr="preencoded.png"/>
           <p:cNvPicPr>
             <a:picLocks noChangeAspect="1"/>
           </p:cNvPicPr>
           <p:nvPr/>
         </p:nvPicPr>
         <p:blipFill>
-          <a:blip r:embed="rId3">
+          <a:blip>
             <a:extLst>
               <a:ext uri="{96DAC541-7B7A-43D3-8B79-37D633B846F1}">
                 <asvg:svgBlip xmlns:asvg="http://schemas.microsoft.com/office/drawing/2016/SVG/main" r:embed="rId7"/>
@@ -5170,7 +5678,7 @@
         </p:blipFill>
         <p:spPr>
           <a:xfrm>
-            <a:off x="793790" y="4922758"/>
+            <a:off x="5235893" y="4922758"/>
             <a:ext cx="566976" cy="566976"/>
           </a:xfrm>
           <a:prstGeom prst="rect">
@@ -5180,14 +5688,14 @@
       </p:pic>
       <p:sp>
         <p:nvSpPr>
-          <p:cNvPr id="13" name="Text 7"/>
-          <p:cNvSpPr/>
-          <p:nvPr/>
-        </p:nvSpPr>
-        <p:spPr>
-          <a:xfrm>
-            <a:off x="793790" y="5773222"/>
-            <a:ext cx="3667363" cy="354330"/>
+          <p:cNvPr id="16" name="Text 9"/>
+          <p:cNvSpPr/>
+          <p:nvPr/>
+        </p:nvSpPr>
+        <p:spPr>
+          <a:xfrm>
+            <a:off x="5235893" y="5773222"/>
+            <a:ext cx="3923824" cy="354330"/>
           </a:xfrm>
           <a:prstGeom prst="rect">
             <a:avLst/>
@@ -5214,7 +5722,7 @@
                 <a:ea typeface="IBM Plex Sans Medium" pitchFamily="34" charset="-122"/>
                 <a:cs typeface="IBM Plex Sans Medium" pitchFamily="34" charset="-120"/>
               </a:rPr>
-              <a:t>Студенты и исследователи</a:t>
+              <a:t>Люди, ценящие приватность</a:t>
             </a:r>
             <a:endParaRPr lang="en-US" sz="2200" dirty="0"/>
           </a:p>
@@ -5222,14 +5730,14 @@
       </p:sp>
       <p:sp>
         <p:nvSpPr>
-          <p:cNvPr id="14" name="Text 8"/>
-          <p:cNvSpPr/>
-          <p:nvPr/>
-        </p:nvSpPr>
-        <p:spPr>
-          <a:xfrm>
-            <a:off x="793790" y="6263640"/>
-            <a:ext cx="4158615" cy="1088708"/>
+          <p:cNvPr id="17" name="Text 10"/>
+          <p:cNvSpPr/>
+          <p:nvPr/>
+        </p:nvSpPr>
+        <p:spPr>
+          <a:xfrm>
+            <a:off x="5235893" y="6263640"/>
+            <a:ext cx="4158615" cy="725805"/>
           </a:xfrm>
           <a:prstGeom prst="rect">
             <a:avLst/>
@@ -5256,123 +5764,63 @@
                 <a:ea typeface="Roboto" pitchFamily="34" charset="-122"/>
                 <a:cs typeface="Roboto" pitchFamily="34" charset="-120"/>
               </a:rPr>
-              <a:t>Эксперименты с криптографией изображений и защита исследовательских данных</a:t>
+              <a:t>Дополнительный уровень защиты для цифровых изображений</a:t>
             </a:r>
             <a:endParaRPr lang="en-US" sz="1750" dirty="0"/>
           </a:p>
         </p:txBody>
       </p:sp>
-      <p:pic>
-        <p:nvPicPr>
-          <p:cNvPr id="15" name="Image 4" descr="preencoded.png"/>
-          <p:cNvPicPr>
-            <a:picLocks noChangeAspect="1"/>
-          </p:cNvPicPr>
-          <p:nvPr/>
-        </p:nvPicPr>
-        <p:blipFill>
-          <a:blip r:embed="rId3">
+      <p:sp>
+        <p:nvSpPr>
+          <p:cNvPr id="18" name="Прямоугольник 17">
             <a:extLst>
-              <a:ext uri="{96DAC541-7B7A-43D3-8B79-37D633B846F1}">
-                <asvg:svgBlip xmlns:asvg="http://schemas.microsoft.com/office/drawing/2016/SVG/main" r:embed="rId8"/>
+              <a:ext uri="{FF2B5EF4-FFF2-40B4-BE49-F238E27FC236}">
+                <a16:creationId xmlns:a16="http://schemas.microsoft.com/office/drawing/2014/main" id="{87A4B704-73FF-6EFC-636D-CA20A9945DFC}"/>
               </a:ext>
             </a:extLst>
-          </a:blip>
-          <a:stretch>
-            <a:fillRect/>
-          </a:stretch>
-        </p:blipFill>
-        <p:spPr>
-          <a:xfrm>
-            <a:off x="5235893" y="4922758"/>
-            <a:ext cx="566976" cy="566976"/>
-          </a:xfrm>
-          <a:prstGeom prst="rect">
-            <a:avLst/>
-          </a:prstGeom>
-        </p:spPr>
-      </p:pic>
-      <p:sp>
-        <p:nvSpPr>
-          <p:cNvPr id="16" name="Text 9"/>
-          <p:cNvSpPr/>
-          <p:nvPr/>
-        </p:nvSpPr>
-        <p:spPr>
-          <a:xfrm>
-            <a:off x="5235893" y="5773222"/>
-            <a:ext cx="3923824" cy="354330"/>
-          </a:xfrm>
-          <a:prstGeom prst="rect">
-            <a:avLst/>
-          </a:prstGeom>
-          <a:noFill/>
-          <a:ln/>
-        </p:spPr>
-        <p:txBody>
-          <a:bodyPr wrap="none" lIns="0" tIns="0" rIns="0" bIns="0" rtlCol="0" anchor="t"/>
-          <a:lstStyle/>
-          <a:p>
-            <a:pPr marL="0" indent="0" algn="l">
-              <a:lnSpc>
-                <a:spcPts val="2750"/>
-              </a:lnSpc>
-              <a:buNone/>
-            </a:pPr>
-            <a:r>
-              <a:rPr lang="en-US" sz="2200" dirty="0">
-                <a:solidFill>
-                  <a:srgbClr val="D4D4D1"/>
-                </a:solidFill>
-                <a:latin typeface="IBM Plex Sans Medium" pitchFamily="34" charset="0"/>
-                <a:ea typeface="IBM Plex Sans Medium" pitchFamily="34" charset="-122"/>
-                <a:cs typeface="IBM Plex Sans Medium" pitchFamily="34" charset="-120"/>
-              </a:rPr>
-              <a:t>Люди, ценящие приватность</a:t>
-            </a:r>
-            <a:endParaRPr lang="en-US" sz="2200" dirty="0"/>
-          </a:p>
-        </p:txBody>
-      </p:sp>
-      <p:sp>
-        <p:nvSpPr>
-          <p:cNvPr id="17" name="Text 10"/>
-          <p:cNvSpPr/>
-          <p:nvPr/>
-        </p:nvSpPr>
-        <p:spPr>
-          <a:xfrm>
-            <a:off x="5235893" y="6263640"/>
-            <a:ext cx="4158615" cy="725805"/>
-          </a:xfrm>
-          <a:prstGeom prst="rect">
-            <a:avLst/>
-          </a:prstGeom>
-          <a:noFill/>
-          <a:ln/>
-        </p:spPr>
-        <p:txBody>
-          <a:bodyPr wrap="square" lIns="0" tIns="0" rIns="0" bIns="0" rtlCol="0" anchor="t"/>
-          <a:lstStyle/>
-          <a:p>
-            <a:pPr marL="0" indent="0" algn="l">
-              <a:lnSpc>
-                <a:spcPts val="2850"/>
-              </a:lnSpc>
-              <a:buNone/>
-            </a:pPr>
-            <a:r>
-              <a:rPr lang="en-US" sz="1750" dirty="0">
-                <a:solidFill>
-                  <a:srgbClr val="D4D4D1"/>
-                </a:solidFill>
-                <a:latin typeface="Roboto" pitchFamily="34" charset="0"/>
-                <a:ea typeface="Roboto" pitchFamily="34" charset="-122"/>
-                <a:cs typeface="Roboto" pitchFamily="34" charset="-120"/>
-              </a:rPr>
-              <a:t>Дополнительный уровень защиты для цифровых изображений</a:t>
-            </a:r>
-            <a:endParaRPr lang="en-US" sz="1750" dirty="0"/>
+          </p:cNvPr>
+          <p:cNvSpPr/>
+          <p:nvPr/>
+        </p:nvSpPr>
+        <p:spPr>
+          <a:xfrm>
+            <a:off x="12827924" y="7731236"/>
+            <a:ext cx="1677785" cy="466758"/>
+          </a:xfrm>
+          <a:prstGeom prst="rect">
+            <a:avLst/>
+          </a:prstGeom>
+          <a:solidFill>
+            <a:srgbClr val="292C32"/>
+          </a:solidFill>
+          <a:ln>
+            <a:solidFill>
+              <a:srgbClr val="292C32"/>
+            </a:solidFill>
+          </a:ln>
+        </p:spPr>
+        <p:style>
+          <a:lnRef idx="2">
+            <a:schemeClr val="accent1">
+              <a:shade val="15000"/>
+            </a:schemeClr>
+          </a:lnRef>
+          <a:fillRef idx="1">
+            <a:schemeClr val="accent1"/>
+          </a:fillRef>
+          <a:effectRef idx="0">
+            <a:schemeClr val="accent1"/>
+          </a:effectRef>
+          <a:fontRef idx="minor">
+            <a:schemeClr val="lt1"/>
+          </a:fontRef>
+        </p:style>
+        <p:txBody>
+          <a:bodyPr rtlCol="0" anchor="ctr"/>
+          <a:lstStyle/>
+          <a:p>
+            <a:pPr algn="ctr"/>
+            <a:endParaRPr lang="ru-RU"/>
           </a:p>
         </p:txBody>
       </p:sp>
@@ -5488,6 +5936,13 @@
           </a:solidFill>
           <a:ln/>
         </p:spPr>
+        <p:txBody>
+          <a:bodyPr/>
+          <a:lstStyle/>
+          <a:p>
+            <a:endParaRPr lang="ru-RU"/>
+          </a:p>
+        </p:txBody>
       </p:sp>
       <p:sp>
         <p:nvSpPr>
@@ -5510,6 +5965,13 @@
           </a:solidFill>
           <a:ln/>
         </p:spPr>
+        <p:txBody>
+          <a:bodyPr/>
+          <a:lstStyle/>
+          <a:p>
+            <a:endParaRPr lang="ru-RU"/>
+          </a:p>
+        </p:txBody>
       </p:sp>
       <p:sp>
         <p:nvSpPr>
@@ -5532,6 +5994,13 @@
           </a:solidFill>
           <a:ln/>
         </p:spPr>
+        <p:txBody>
+          <a:bodyPr/>
+          <a:lstStyle/>
+          <a:p>
+            <a:endParaRPr lang="ru-RU"/>
+          </a:p>
+        </p:txBody>
       </p:sp>
       <p:sp>
         <p:nvSpPr>
@@ -5680,6 +6149,13 @@
           </a:solidFill>
           <a:ln/>
         </p:spPr>
+        <p:txBody>
+          <a:bodyPr/>
+          <a:lstStyle/>
+          <a:p>
+            <a:endParaRPr lang="ru-RU"/>
+          </a:p>
+        </p:txBody>
       </p:sp>
       <p:sp>
         <p:nvSpPr>
@@ -5702,6 +6178,13 @@
           </a:solidFill>
           <a:ln/>
         </p:spPr>
+        <p:txBody>
+          <a:bodyPr/>
+          <a:lstStyle/>
+          <a:p>
+            <a:endParaRPr lang="ru-RU"/>
+          </a:p>
+        </p:txBody>
       </p:sp>
       <p:sp>
         <p:nvSpPr>
@@ -5850,6 +6333,13 @@
           </a:solidFill>
           <a:ln/>
         </p:spPr>
+        <p:txBody>
+          <a:bodyPr/>
+          <a:lstStyle/>
+          <a:p>
+            <a:endParaRPr lang="ru-RU"/>
+          </a:p>
+        </p:txBody>
       </p:sp>
       <p:sp>
         <p:nvSpPr>
@@ -5872,6 +6362,13 @@
           </a:solidFill>
           <a:ln/>
         </p:spPr>
+        <p:txBody>
+          <a:bodyPr/>
+          <a:lstStyle/>
+          <a:p>
+            <a:endParaRPr lang="ru-RU"/>
+          </a:p>
+        </p:txBody>
       </p:sp>
       <p:sp>
         <p:nvSpPr>
@@ -6020,6 +6517,13 @@
           </a:solidFill>
           <a:ln/>
         </p:spPr>
+        <p:txBody>
+          <a:bodyPr/>
+          <a:lstStyle/>
+          <a:p>
+            <a:endParaRPr lang="ru-RU"/>
+          </a:p>
+        </p:txBody>
       </p:sp>
       <p:sp>
         <p:nvSpPr>
@@ -6042,6 +6546,13 @@
           </a:solidFill>
           <a:ln/>
         </p:spPr>
+        <p:txBody>
+          <a:bodyPr/>
+          <a:lstStyle/>
+          <a:p>
+            <a:endParaRPr lang="ru-RU"/>
+          </a:p>
+        </p:txBody>
       </p:sp>
       <p:sp>
         <p:nvSpPr>
@@ -6219,6 +6730,60 @@
               <a:t> Постоянный интерес к приватности и безопасности в цифровом мире.</a:t>
             </a:r>
             <a:endParaRPr lang="en-US" sz="1400" dirty="0"/>
+          </a:p>
+        </p:txBody>
+      </p:sp>
+      <p:sp>
+        <p:nvSpPr>
+          <p:cNvPr id="26" name="Прямоугольник 25">
+            <a:extLst>
+              <a:ext uri="{FF2B5EF4-FFF2-40B4-BE49-F238E27FC236}">
+                <a16:creationId xmlns:a16="http://schemas.microsoft.com/office/drawing/2014/main" id="{7F0585B8-74D4-7940-188F-C15B20BCCDE3}"/>
+              </a:ext>
+            </a:extLst>
+          </p:cNvPr>
+          <p:cNvSpPr/>
+          <p:nvPr/>
+        </p:nvSpPr>
+        <p:spPr>
+          <a:xfrm>
+            <a:off x="12827924" y="7731236"/>
+            <a:ext cx="1677785" cy="466758"/>
+          </a:xfrm>
+          <a:prstGeom prst="rect">
+            <a:avLst/>
+          </a:prstGeom>
+          <a:solidFill>
+            <a:srgbClr val="292C32"/>
+          </a:solidFill>
+          <a:ln>
+            <a:solidFill>
+              <a:srgbClr val="292C32"/>
+            </a:solidFill>
+          </a:ln>
+        </p:spPr>
+        <p:style>
+          <a:lnRef idx="2">
+            <a:schemeClr val="accent1">
+              <a:shade val="15000"/>
+            </a:schemeClr>
+          </a:lnRef>
+          <a:fillRef idx="1">
+            <a:schemeClr val="accent1"/>
+          </a:fillRef>
+          <a:effectRef idx="0">
+            <a:schemeClr val="accent1"/>
+          </a:effectRef>
+          <a:fontRef idx="minor">
+            <a:schemeClr val="lt1"/>
+          </a:fontRef>
+        </p:style>
+        <p:txBody>
+          <a:bodyPr rtlCol="0" anchor="ctr"/>
+          <a:lstStyle/>
+          <a:p>
+            <a:pPr algn="ctr"/>
+            <a:endParaRPr lang="ru-RU"/>
           </a:p>
         </p:txBody>
       </p:sp>
@@ -6345,6 +6910,13 @@
           </a:solidFill>
           <a:ln/>
         </p:spPr>
+        <p:txBody>
+          <a:bodyPr/>
+          <a:lstStyle/>
+          <a:p>
+            <a:endParaRPr lang="ru-RU"/>
+          </a:p>
+        </p:txBody>
       </p:sp>
       <p:sp>
         <p:nvSpPr>
@@ -6367,6 +6939,13 @@
           </a:solidFill>
           <a:ln/>
         </p:spPr>
+        <p:txBody>
+          <a:bodyPr/>
+          <a:lstStyle/>
+          <a:p>
+            <a:endParaRPr lang="ru-RU"/>
+          </a:p>
+        </p:txBody>
       </p:sp>
       <p:pic>
         <p:nvPicPr>
@@ -6377,7 +6956,179 @@
           <p:nvPr/>
         </p:nvPicPr>
         <p:blipFill>
-          <a:blip r:embed="rId4">
+          <a:blip>
+            <a:extLst>
+              <a:ext uri="{96DAC541-7B7A-43D3-8B79-37D633B846F1}">
+                <asvg:svgBlip xmlns:asvg="http://schemas.microsoft.com/office/drawing/2016/SVG/main" r:embed="rId4"/>
+              </a:ext>
+            </a:extLst>
+          </a:blip>
+          <a:stretch>
+            <a:fillRect/>
+          </a:stretch>
+        </p:blipFill>
+        <p:spPr>
+          <a:xfrm>
+            <a:off x="710089" y="2168128"/>
+            <a:ext cx="180023" cy="180023"/>
+          </a:xfrm>
+          <a:prstGeom prst="rect">
+            <a:avLst/>
+          </a:prstGeom>
+        </p:spPr>
+      </p:pic>
+      <p:sp>
+        <p:nvSpPr>
+          <p:cNvPr id="7" name="Text 3"/>
+          <p:cNvSpPr/>
+          <p:nvPr/>
+        </p:nvSpPr>
+        <p:spPr>
+          <a:xfrm>
+            <a:off x="600075" y="2536508"/>
+            <a:ext cx="1991678" cy="208359"/>
+          </a:xfrm>
+          <a:prstGeom prst="rect">
+            <a:avLst/>
+          </a:prstGeom>
+          <a:noFill/>
+          <a:ln/>
+        </p:spPr>
+        <p:txBody>
+          <a:bodyPr wrap="none" lIns="0" tIns="0" rIns="0" bIns="0" rtlCol="0" anchor="t"/>
+          <a:lstStyle/>
+          <a:p>
+            <a:pPr marL="0" indent="0" algn="l">
+              <a:lnSpc>
+                <a:spcPts val="1600"/>
+              </a:lnSpc>
+              <a:buNone/>
+            </a:pPr>
+            <a:r>
+              <a:rPr lang="en-US" sz="1300" dirty="0">
+                <a:solidFill>
+                  <a:srgbClr val="D4D4D1"/>
+                </a:solidFill>
+                <a:latin typeface="IBM Plex Sans Medium" pitchFamily="34" charset="0"/>
+                <a:ea typeface="IBM Plex Sans Medium" pitchFamily="34" charset="-122"/>
+                <a:cs typeface="IBM Plex Sans Medium" pitchFamily="34" charset="-120"/>
+              </a:rPr>
+              <a:t>Простота использования</a:t>
+            </a:r>
+            <a:endParaRPr lang="en-US" sz="1300" dirty="0"/>
+          </a:p>
+        </p:txBody>
+      </p:sp>
+      <p:sp>
+        <p:nvSpPr>
+          <p:cNvPr id="8" name="Text 4"/>
+          <p:cNvSpPr/>
+          <p:nvPr/>
+        </p:nvSpPr>
+        <p:spPr>
+          <a:xfrm>
+            <a:off x="600075" y="2791897"/>
+            <a:ext cx="7943850" cy="169307"/>
+          </a:xfrm>
+          <a:prstGeom prst="rect">
+            <a:avLst/>
+          </a:prstGeom>
+          <a:noFill/>
+          <a:ln/>
+        </p:spPr>
+        <p:txBody>
+          <a:bodyPr wrap="none" lIns="0" tIns="0" rIns="0" bIns="0" rtlCol="0" anchor="t"/>
+          <a:lstStyle/>
+          <a:p>
+            <a:pPr marL="0" indent="0" algn="l">
+              <a:lnSpc>
+                <a:spcPts val="1300"/>
+              </a:lnSpc>
+              <a:buNone/>
+            </a:pPr>
+            <a:r>
+              <a:rPr lang="en-US" sz="1050" dirty="0">
+                <a:solidFill>
+                  <a:srgbClr val="D4D4D1"/>
+                </a:solidFill>
+                <a:latin typeface="Roboto" pitchFamily="34" charset="0"/>
+                <a:ea typeface="Roboto" pitchFamily="34" charset="-122"/>
+                <a:cs typeface="Roboto" pitchFamily="34" charset="-120"/>
+              </a:rPr>
+              <a:t>Интуитивно понятный интерфейс, особенно с GUI, доступный даже новичкам</a:t>
+            </a:r>
+            <a:endParaRPr lang="en-US" sz="1050" dirty="0"/>
+          </a:p>
+        </p:txBody>
+      </p:sp>
+      <p:sp>
+        <p:nvSpPr>
+          <p:cNvPr id="9" name="Shape 5"/>
+          <p:cNvSpPr/>
+          <p:nvPr/>
+        </p:nvSpPr>
+        <p:spPr>
+          <a:xfrm>
+            <a:off x="466725" y="3172897"/>
+            <a:ext cx="8210550" cy="1169789"/>
+          </a:xfrm>
+          <a:prstGeom prst="roundRect">
+            <a:avLst>
+              <a:gd name="adj" fmla="val 1710"/>
+            </a:avLst>
+          </a:prstGeom>
+          <a:solidFill>
+            <a:srgbClr val="484B51"/>
+          </a:solidFill>
+          <a:ln/>
+        </p:spPr>
+        <p:txBody>
+          <a:bodyPr/>
+          <a:lstStyle/>
+          <a:p>
+            <a:endParaRPr lang="ru-RU"/>
+          </a:p>
+        </p:txBody>
+      </p:sp>
+      <p:sp>
+        <p:nvSpPr>
+          <p:cNvPr id="10" name="Shape 6"/>
+          <p:cNvSpPr/>
+          <p:nvPr/>
+        </p:nvSpPr>
+        <p:spPr>
+          <a:xfrm>
+            <a:off x="600075" y="3306247"/>
+            <a:ext cx="400050" cy="400050"/>
+          </a:xfrm>
+          <a:prstGeom prst="roundRect">
+            <a:avLst>
+              <a:gd name="adj" fmla="val 22854857"/>
+            </a:avLst>
+          </a:prstGeom>
+          <a:solidFill>
+            <a:srgbClr val="FFBC8F"/>
+          </a:solidFill>
+          <a:ln/>
+        </p:spPr>
+        <p:txBody>
+          <a:bodyPr/>
+          <a:lstStyle/>
+          <a:p>
+            <a:endParaRPr lang="ru-RU"/>
+          </a:p>
+        </p:txBody>
+      </p:sp>
+      <p:pic>
+        <p:nvPicPr>
+          <p:cNvPr id="11" name="Image 2" descr="preencoded.png"/>
+          <p:cNvPicPr>
+            <a:picLocks noChangeAspect="1"/>
+          </p:cNvPicPr>
+          <p:nvPr/>
+        </p:nvPicPr>
+        <p:blipFill>
+          <a:blip>
             <a:extLst>
               <a:ext uri="{96DAC541-7B7A-43D3-8B79-37D633B846F1}">
                 <asvg:svgBlip xmlns:asvg="http://schemas.microsoft.com/office/drawing/2016/SVG/main" r:embed="rId5"/>
@@ -6390,7 +7141,7 @@
         </p:blipFill>
         <p:spPr>
           <a:xfrm>
-            <a:off x="710089" y="2168128"/>
+            <a:off x="710089" y="3416260"/>
             <a:ext cx="180023" cy="180023"/>
           </a:xfrm>
           <a:prstGeom prst="rect">
@@ -6400,14 +7151,14 @@
       </p:pic>
       <p:sp>
         <p:nvSpPr>
-          <p:cNvPr id="7" name="Text 3"/>
-          <p:cNvSpPr/>
-          <p:nvPr/>
-        </p:nvSpPr>
-        <p:spPr>
-          <a:xfrm>
-            <a:off x="600075" y="2536508"/>
-            <a:ext cx="1991678" cy="208359"/>
+          <p:cNvPr id="12" name="Text 7"/>
+          <p:cNvSpPr/>
+          <p:nvPr/>
+        </p:nvSpPr>
+        <p:spPr>
+          <a:xfrm>
+            <a:off x="600075" y="3784640"/>
+            <a:ext cx="1666875" cy="208359"/>
           </a:xfrm>
           <a:prstGeom prst="rect">
             <a:avLst/>
@@ -6434,7 +7185,7 @@
                 <a:ea typeface="IBM Plex Sans Medium" pitchFamily="34" charset="-122"/>
                 <a:cs typeface="IBM Plex Sans Medium" pitchFamily="34" charset="-120"/>
               </a:rPr>
-              <a:t>Простота использования</a:t>
+              <a:t>Доступность</a:t>
             </a:r>
             <a:endParaRPr lang="en-US" sz="1300" dirty="0"/>
           </a:p>
@@ -6442,13 +7193,13 @@
       </p:sp>
       <p:sp>
         <p:nvSpPr>
-          <p:cNvPr id="8" name="Text 4"/>
-          <p:cNvSpPr/>
-          <p:nvPr/>
-        </p:nvSpPr>
-        <p:spPr>
-          <a:xfrm>
-            <a:off x="600075" y="2791897"/>
+          <p:cNvPr id="13" name="Text 8"/>
+          <p:cNvSpPr/>
+          <p:nvPr/>
+        </p:nvSpPr>
+        <p:spPr>
+          <a:xfrm>
+            <a:off x="600075" y="4040029"/>
             <a:ext cx="7943850" cy="169307"/>
           </a:xfrm>
           <a:prstGeom prst="rect">
@@ -6476,7 +7227,7 @@
                 <a:ea typeface="Roboto" pitchFamily="34" charset="-122"/>
                 <a:cs typeface="Roboto" pitchFamily="34" charset="-120"/>
               </a:rPr>
-              <a:t>Интуитивно понятный интерфейс, особенно с GUI, доступный даже новичкам</a:t>
+              <a:t>Низкая стоимость делает его привлекательным для широкой аудитории</a:t>
             </a:r>
             <a:endParaRPr lang="en-US" sz="1050" dirty="0"/>
           </a:p>
@@ -6484,13 +7235,13 @@
       </p:sp>
       <p:sp>
         <p:nvSpPr>
-          <p:cNvPr id="9" name="Shape 5"/>
-          <p:cNvSpPr/>
-          <p:nvPr/>
-        </p:nvSpPr>
-        <p:spPr>
-          <a:xfrm>
-            <a:off x="466725" y="3172897"/>
+          <p:cNvPr id="14" name="Shape 9"/>
+          <p:cNvSpPr/>
+          <p:nvPr/>
+        </p:nvSpPr>
+        <p:spPr>
+          <a:xfrm>
+            <a:off x="466725" y="4421029"/>
             <a:ext cx="8210550" cy="1169789"/>
           </a:xfrm>
           <a:prstGeom prst="roundRect">
@@ -6503,16 +7254,23 @@
           </a:solidFill>
           <a:ln/>
         </p:spPr>
-      </p:sp>
-      <p:sp>
-        <p:nvSpPr>
-          <p:cNvPr id="10" name="Shape 6"/>
-          <p:cNvSpPr/>
-          <p:nvPr/>
-        </p:nvSpPr>
-        <p:spPr>
-          <a:xfrm>
-            <a:off x="600075" y="3306247"/>
+        <p:txBody>
+          <a:bodyPr/>
+          <a:lstStyle/>
+          <a:p>
+            <a:endParaRPr lang="ru-RU"/>
+          </a:p>
+        </p:txBody>
+      </p:sp>
+      <p:sp>
+        <p:nvSpPr>
+          <p:cNvPr id="15" name="Shape 10"/>
+          <p:cNvSpPr/>
+          <p:nvPr/>
+        </p:nvSpPr>
+        <p:spPr>
+          <a:xfrm>
+            <a:off x="600075" y="4554379"/>
             <a:ext cx="400050" cy="400050"/>
           </a:xfrm>
           <a:prstGeom prst="roundRect">
@@ -6525,17 +7283,24 @@
           </a:solidFill>
           <a:ln/>
         </p:spPr>
+        <p:txBody>
+          <a:bodyPr/>
+          <a:lstStyle/>
+          <a:p>
+            <a:endParaRPr lang="ru-RU"/>
+          </a:p>
+        </p:txBody>
       </p:sp>
       <p:pic>
         <p:nvPicPr>
-          <p:cNvPr id="11" name="Image 2" descr="preencoded.png"/>
+          <p:cNvPr id="16" name="Image 3" descr="preencoded.png"/>
           <p:cNvPicPr>
             <a:picLocks noChangeAspect="1"/>
           </p:cNvPicPr>
           <p:nvPr/>
         </p:nvPicPr>
         <p:blipFill>
-          <a:blip r:embed="rId4">
+          <a:blip>
             <a:extLst>
               <a:ext uri="{96DAC541-7B7A-43D3-8B79-37D633B846F1}">
                 <asvg:svgBlip xmlns:asvg="http://schemas.microsoft.com/office/drawing/2016/SVG/main" r:embed="rId6"/>
@@ -6548,7 +7313,7 @@
         </p:blipFill>
         <p:spPr>
           <a:xfrm>
-            <a:off x="710089" y="3416260"/>
+            <a:off x="710089" y="4664393"/>
             <a:ext cx="180023" cy="180023"/>
           </a:xfrm>
           <a:prstGeom prst="rect">
@@ -6558,13 +7323,13 @@
       </p:pic>
       <p:sp>
         <p:nvSpPr>
-          <p:cNvPr id="12" name="Text 7"/>
-          <p:cNvSpPr/>
-          <p:nvPr/>
-        </p:nvSpPr>
-        <p:spPr>
-          <a:xfrm>
-            <a:off x="600075" y="3784640"/>
+          <p:cNvPr id="17" name="Text 11"/>
+          <p:cNvSpPr/>
+          <p:nvPr/>
+        </p:nvSpPr>
+        <p:spPr>
+          <a:xfrm>
+            <a:off x="600075" y="5032772"/>
             <a:ext cx="1666875" cy="208359"/>
           </a:xfrm>
           <a:prstGeom prst="rect">
@@ -6592,7 +7357,7 @@
                 <a:ea typeface="IBM Plex Sans Medium" pitchFamily="34" charset="-122"/>
                 <a:cs typeface="IBM Plex Sans Medium" pitchFamily="34" charset="-120"/>
               </a:rPr>
-              <a:t>Доступность</a:t>
+              <a:t>Эффективность</a:t>
             </a:r>
             <a:endParaRPr lang="en-US" sz="1300" dirty="0"/>
           </a:p>
@@ -6600,13 +7365,13 @@
       </p:sp>
       <p:sp>
         <p:nvSpPr>
-          <p:cNvPr id="13" name="Text 8"/>
-          <p:cNvSpPr/>
-          <p:nvPr/>
-        </p:nvSpPr>
-        <p:spPr>
-          <a:xfrm>
-            <a:off x="600075" y="4040029"/>
+          <p:cNvPr id="18" name="Text 12"/>
+          <p:cNvSpPr/>
+          <p:nvPr/>
+        </p:nvSpPr>
+        <p:spPr>
+          <a:xfrm>
+            <a:off x="600075" y="5288161"/>
             <a:ext cx="7943850" cy="169307"/>
           </a:xfrm>
           <a:prstGeom prst="rect">
@@ -6634,7 +7399,7 @@
                 <a:ea typeface="Roboto" pitchFamily="34" charset="-122"/>
                 <a:cs typeface="Roboto" pitchFamily="34" charset="-120"/>
               </a:rPr>
-              <a:t>Низкая стоимость делает его привлекательным для широкой аудитории</a:t>
+              <a:t>Обеспечивает базовый, но надежный уровень защиты изображений</a:t>
             </a:r>
             <a:endParaRPr lang="en-US" sz="1050" dirty="0"/>
           </a:p>
@@ -6642,13 +7407,13 @@
       </p:sp>
       <p:sp>
         <p:nvSpPr>
-          <p:cNvPr id="14" name="Shape 9"/>
-          <p:cNvSpPr/>
-          <p:nvPr/>
-        </p:nvSpPr>
-        <p:spPr>
-          <a:xfrm>
-            <a:off x="466725" y="4421029"/>
+          <p:cNvPr id="19" name="Shape 13"/>
+          <p:cNvSpPr/>
+          <p:nvPr/>
+        </p:nvSpPr>
+        <p:spPr>
+          <a:xfrm>
+            <a:off x="466725" y="5669161"/>
             <a:ext cx="8210550" cy="1169789"/>
           </a:xfrm>
           <a:prstGeom prst="roundRect">
@@ -6661,16 +7426,23 @@
           </a:solidFill>
           <a:ln/>
         </p:spPr>
-      </p:sp>
-      <p:sp>
-        <p:nvSpPr>
-          <p:cNvPr id="15" name="Shape 10"/>
-          <p:cNvSpPr/>
-          <p:nvPr/>
-        </p:nvSpPr>
-        <p:spPr>
-          <a:xfrm>
-            <a:off x="600075" y="4554379"/>
+        <p:txBody>
+          <a:bodyPr/>
+          <a:lstStyle/>
+          <a:p>
+            <a:endParaRPr lang="ru-RU"/>
+          </a:p>
+        </p:txBody>
+      </p:sp>
+      <p:sp>
+        <p:nvSpPr>
+          <p:cNvPr id="20" name="Shape 14"/>
+          <p:cNvSpPr/>
+          <p:nvPr/>
+        </p:nvSpPr>
+        <p:spPr>
+          <a:xfrm>
+            <a:off x="600075" y="5802511"/>
             <a:ext cx="400050" cy="400050"/>
           </a:xfrm>
           <a:prstGeom prst="roundRect">
@@ -6683,17 +7455,24 @@
           </a:solidFill>
           <a:ln/>
         </p:spPr>
+        <p:txBody>
+          <a:bodyPr/>
+          <a:lstStyle/>
+          <a:p>
+            <a:endParaRPr lang="ru-RU"/>
+          </a:p>
+        </p:txBody>
       </p:sp>
       <p:pic>
         <p:nvPicPr>
-          <p:cNvPr id="16" name="Image 3" descr="preencoded.png"/>
+          <p:cNvPr id="21" name="Image 4" descr="preencoded.png"/>
           <p:cNvPicPr>
             <a:picLocks noChangeAspect="1"/>
           </p:cNvPicPr>
           <p:nvPr/>
         </p:nvPicPr>
         <p:blipFill>
-          <a:blip r:embed="rId4">
+          <a:blip>
             <a:extLst>
               <a:ext uri="{96DAC541-7B7A-43D3-8B79-37D633B846F1}">
                 <asvg:svgBlip xmlns:asvg="http://schemas.microsoft.com/office/drawing/2016/SVG/main" r:embed="rId7"/>
@@ -6706,7 +7485,7 @@
         </p:blipFill>
         <p:spPr>
           <a:xfrm>
-            <a:off x="710089" y="4664393"/>
+            <a:off x="710089" y="5912525"/>
             <a:ext cx="180023" cy="180023"/>
           </a:xfrm>
           <a:prstGeom prst="rect">
@@ -6716,13 +7495,13 @@
       </p:pic>
       <p:sp>
         <p:nvSpPr>
-          <p:cNvPr id="17" name="Text 11"/>
-          <p:cNvSpPr/>
-          <p:nvPr/>
-        </p:nvSpPr>
-        <p:spPr>
-          <a:xfrm>
-            <a:off x="600075" y="5032772"/>
+          <p:cNvPr id="22" name="Text 15"/>
+          <p:cNvSpPr/>
+          <p:nvPr/>
+        </p:nvSpPr>
+        <p:spPr>
+          <a:xfrm>
+            <a:off x="600075" y="6280904"/>
             <a:ext cx="1666875" cy="208359"/>
           </a:xfrm>
           <a:prstGeom prst="rect">
@@ -6750,7 +7529,7 @@
                 <a:ea typeface="IBM Plex Sans Medium" pitchFamily="34" charset="-122"/>
                 <a:cs typeface="IBM Plex Sans Medium" pitchFamily="34" charset="-120"/>
               </a:rPr>
-              <a:t>Эффективность</a:t>
+              <a:t>Гибкость</a:t>
             </a:r>
             <a:endParaRPr lang="en-US" sz="1300" dirty="0"/>
           </a:p>
@@ -6758,13 +7537,13 @@
       </p:sp>
       <p:sp>
         <p:nvSpPr>
-          <p:cNvPr id="18" name="Text 12"/>
-          <p:cNvSpPr/>
-          <p:nvPr/>
-        </p:nvSpPr>
-        <p:spPr>
-          <a:xfrm>
-            <a:off x="600075" y="5288161"/>
+          <p:cNvPr id="23" name="Text 16"/>
+          <p:cNvSpPr/>
+          <p:nvPr/>
+        </p:nvSpPr>
+        <p:spPr>
+          <a:xfrm>
+            <a:off x="600075" y="6536293"/>
             <a:ext cx="7943850" cy="169307"/>
           </a:xfrm>
           <a:prstGeom prst="rect">
@@ -6792,7 +7571,7 @@
                 <a:ea typeface="Roboto" pitchFamily="34" charset="-122"/>
                 <a:cs typeface="Roboto" pitchFamily="34" charset="-120"/>
               </a:rPr>
-              <a:t>Обеспечивает базовый, но надежный уровень защиты изображений</a:t>
+              <a:t>Возможность дальнейшего развития и добавления новых функций</a:t>
             </a:r>
             <a:endParaRPr lang="en-US" sz="1050" dirty="0"/>
           </a:p>
@@ -6800,159 +7579,55 @@
       </p:sp>
       <p:sp>
         <p:nvSpPr>
-          <p:cNvPr id="19" name="Shape 13"/>
-          <p:cNvSpPr/>
-          <p:nvPr/>
-        </p:nvSpPr>
-        <p:spPr>
-          <a:xfrm>
-            <a:off x="466725" y="5669161"/>
-            <a:ext cx="8210550" cy="1169789"/>
-          </a:xfrm>
-          <a:prstGeom prst="roundRect">
-            <a:avLst>
-              <a:gd name="adj" fmla="val 1710"/>
-            </a:avLst>
-          </a:prstGeom>
-          <a:solidFill>
-            <a:srgbClr val="484B51"/>
-          </a:solidFill>
-          <a:ln/>
-        </p:spPr>
-      </p:sp>
-      <p:sp>
-        <p:nvSpPr>
-          <p:cNvPr id="20" name="Shape 14"/>
-          <p:cNvSpPr/>
-          <p:nvPr/>
-        </p:nvSpPr>
-        <p:spPr>
-          <a:xfrm>
-            <a:off x="600075" y="5802511"/>
-            <a:ext cx="400050" cy="400050"/>
-          </a:xfrm>
-          <a:prstGeom prst="roundRect">
-            <a:avLst>
-              <a:gd name="adj" fmla="val 22854857"/>
-            </a:avLst>
-          </a:prstGeom>
-          <a:solidFill>
-            <a:srgbClr val="FFBC8F"/>
-          </a:solidFill>
-          <a:ln/>
-        </p:spPr>
-      </p:sp>
-      <p:pic>
-        <p:nvPicPr>
-          <p:cNvPr id="21" name="Image 4" descr="preencoded.png"/>
-          <p:cNvPicPr>
-            <a:picLocks noChangeAspect="1"/>
-          </p:cNvPicPr>
-          <p:nvPr/>
-        </p:nvPicPr>
-        <p:blipFill>
-          <a:blip r:embed="rId4">
+          <p:cNvPr id="24" name="Прямоугольник 23">
             <a:extLst>
-              <a:ext uri="{96DAC541-7B7A-43D3-8B79-37D633B846F1}">
-                <asvg:svgBlip xmlns:asvg="http://schemas.microsoft.com/office/drawing/2016/SVG/main" r:embed="rId8"/>
+              <a:ext uri="{FF2B5EF4-FFF2-40B4-BE49-F238E27FC236}">
+                <a16:creationId xmlns:a16="http://schemas.microsoft.com/office/drawing/2014/main" id="{308D1107-6193-2E2E-A238-C09A2C8D2593}"/>
               </a:ext>
             </a:extLst>
-          </a:blip>
-          <a:stretch>
-            <a:fillRect/>
-          </a:stretch>
-        </p:blipFill>
-        <p:spPr>
-          <a:xfrm>
-            <a:off x="710089" y="5912525"/>
-            <a:ext cx="180023" cy="180023"/>
-          </a:xfrm>
-          <a:prstGeom prst="rect">
-            <a:avLst/>
-          </a:prstGeom>
-        </p:spPr>
-      </p:pic>
-      <p:sp>
-        <p:nvSpPr>
-          <p:cNvPr id="22" name="Text 15"/>
-          <p:cNvSpPr/>
-          <p:nvPr/>
-        </p:nvSpPr>
-        <p:spPr>
-          <a:xfrm>
-            <a:off x="600075" y="6280904"/>
-            <a:ext cx="1666875" cy="208359"/>
-          </a:xfrm>
-          <a:prstGeom prst="rect">
-            <a:avLst/>
-          </a:prstGeom>
-          <a:noFill/>
-          <a:ln/>
-        </p:spPr>
-        <p:txBody>
-          <a:bodyPr wrap="none" lIns="0" tIns="0" rIns="0" bIns="0" rtlCol="0" anchor="t"/>
-          <a:lstStyle/>
-          <a:p>
-            <a:pPr marL="0" indent="0" algn="l">
-              <a:lnSpc>
-                <a:spcPts val="1600"/>
-              </a:lnSpc>
-              <a:buNone/>
-            </a:pPr>
-            <a:r>
-              <a:rPr lang="en-US" sz="1300" dirty="0">
-                <a:solidFill>
-                  <a:srgbClr val="D4D4D1"/>
-                </a:solidFill>
-                <a:latin typeface="IBM Plex Sans Medium" pitchFamily="34" charset="0"/>
-                <a:ea typeface="IBM Plex Sans Medium" pitchFamily="34" charset="-122"/>
-                <a:cs typeface="IBM Plex Sans Medium" pitchFamily="34" charset="-120"/>
-              </a:rPr>
-              <a:t>Гибкость</a:t>
-            </a:r>
-            <a:endParaRPr lang="en-US" sz="1300" dirty="0"/>
-          </a:p>
-        </p:txBody>
-      </p:sp>
-      <p:sp>
-        <p:nvSpPr>
-          <p:cNvPr id="23" name="Text 16"/>
-          <p:cNvSpPr/>
-          <p:nvPr/>
-        </p:nvSpPr>
-        <p:spPr>
-          <a:xfrm>
-            <a:off x="600075" y="6536293"/>
-            <a:ext cx="7943850" cy="169307"/>
-          </a:xfrm>
-          <a:prstGeom prst="rect">
-            <a:avLst/>
-          </a:prstGeom>
-          <a:noFill/>
-          <a:ln/>
-        </p:spPr>
-        <p:txBody>
-          <a:bodyPr wrap="none" lIns="0" tIns="0" rIns="0" bIns="0" rtlCol="0" anchor="t"/>
-          <a:lstStyle/>
-          <a:p>
-            <a:pPr marL="0" indent="0" algn="l">
-              <a:lnSpc>
-                <a:spcPts val="1300"/>
-              </a:lnSpc>
-              <a:buNone/>
-            </a:pPr>
-            <a:r>
-              <a:rPr lang="en-US" sz="1050" dirty="0">
-                <a:solidFill>
-                  <a:srgbClr val="D4D4D1"/>
-                </a:solidFill>
-                <a:latin typeface="Roboto" pitchFamily="34" charset="0"/>
-                <a:ea typeface="Roboto" pitchFamily="34" charset="-122"/>
-                <a:cs typeface="Roboto" pitchFamily="34" charset="-120"/>
-              </a:rPr>
-              <a:t>Возможность дальнейшего развития и добавления новых функций</a:t>
-            </a:r>
-            <a:endParaRPr lang="en-US" sz="1050" dirty="0"/>
+          </p:cNvPr>
+          <p:cNvSpPr/>
+          <p:nvPr/>
+        </p:nvSpPr>
+        <p:spPr>
+          <a:xfrm>
+            <a:off x="12827924" y="7731236"/>
+            <a:ext cx="1677785" cy="466758"/>
+          </a:xfrm>
+          <a:prstGeom prst="rect">
+            <a:avLst/>
+          </a:prstGeom>
+          <a:solidFill>
+            <a:srgbClr val="292C32"/>
+          </a:solidFill>
+          <a:ln>
+            <a:solidFill>
+              <a:srgbClr val="292C32"/>
+            </a:solidFill>
+          </a:ln>
+        </p:spPr>
+        <p:style>
+          <a:lnRef idx="2">
+            <a:schemeClr val="accent1">
+              <a:shade val="15000"/>
+            </a:schemeClr>
+          </a:lnRef>
+          <a:fillRef idx="1">
+            <a:schemeClr val="accent1"/>
+          </a:fillRef>
+          <a:effectRef idx="0">
+            <a:schemeClr val="accent1"/>
+          </a:effectRef>
+          <a:fontRef idx="minor">
+            <a:schemeClr val="lt1"/>
+          </a:fontRef>
+        </p:style>
+        <p:txBody>
+          <a:bodyPr rtlCol="0" anchor="ctr"/>
+          <a:lstStyle/>
+          <a:p>
+            <a:pPr algn="ctr"/>
+            <a:endParaRPr lang="ru-RU"/>
           </a:p>
         </p:txBody>
       </p:sp>
@@ -7044,6 +7719,13 @@
           </a:solidFill>
           <a:ln/>
         </p:spPr>
+        <p:txBody>
+          <a:bodyPr/>
+          <a:lstStyle/>
+          <a:p>
+            <a:endParaRPr lang="ru-RU"/>
+          </a:p>
+        </p:txBody>
       </p:sp>
       <p:sp>
         <p:nvSpPr>
@@ -7066,6 +7748,13 @@
           </a:solidFill>
           <a:ln/>
         </p:spPr>
+        <p:txBody>
+          <a:bodyPr/>
+          <a:lstStyle/>
+          <a:p>
+            <a:endParaRPr lang="ru-RU"/>
+          </a:p>
+        </p:txBody>
       </p:sp>
       <p:pic>
         <p:nvPicPr>
@@ -7076,7 +7765,179 @@
           <p:nvPr/>
         </p:nvPicPr>
         <p:blipFill>
-          <a:blip r:embed="rId3">
+          <a:blip>
+            <a:extLst>
+              <a:ext uri="{96DAC541-7B7A-43D3-8B79-37D633B846F1}">
+                <asvg:svgBlip xmlns:asvg="http://schemas.microsoft.com/office/drawing/2016/SVG/main" r:embed="rId3"/>
+              </a:ext>
+            </a:extLst>
+          </a:blip>
+          <a:stretch>
+            <a:fillRect/>
+          </a:stretch>
+        </p:blipFill>
+        <p:spPr>
+          <a:xfrm>
+            <a:off x="1089422" y="1779865"/>
+            <a:ext cx="276701" cy="276701"/>
+          </a:xfrm>
+          <a:prstGeom prst="rect">
+            <a:avLst/>
+          </a:prstGeom>
+        </p:spPr>
+      </p:pic>
+      <p:sp>
+        <p:nvSpPr>
+          <p:cNvPr id="6" name="Text 3"/>
+          <p:cNvSpPr/>
+          <p:nvPr/>
+        </p:nvSpPr>
+        <p:spPr>
+          <a:xfrm>
+            <a:off x="1654493" y="1670328"/>
+            <a:ext cx="2305764" cy="288250"/>
+          </a:xfrm>
+          <a:prstGeom prst="rect">
+            <a:avLst/>
+          </a:prstGeom>
+          <a:noFill/>
+          <a:ln/>
+        </p:spPr>
+        <p:txBody>
+          <a:bodyPr wrap="none" lIns="0" tIns="0" rIns="0" bIns="0" rtlCol="0" anchor="t"/>
+          <a:lstStyle/>
+          <a:p>
+            <a:pPr marL="0" indent="0" algn="l">
+              <a:lnSpc>
+                <a:spcPts val="2250"/>
+              </a:lnSpc>
+              <a:buNone/>
+            </a:pPr>
+            <a:r>
+              <a:rPr lang="en-US" sz="1800" dirty="0">
+                <a:solidFill>
+                  <a:srgbClr val="D4D4D1"/>
+                </a:solidFill>
+                <a:latin typeface="IBM Plex Sans Medium" pitchFamily="34" charset="0"/>
+                <a:ea typeface="IBM Plex Sans Medium" pitchFamily="34" charset="-122"/>
+                <a:cs typeface="IBM Plex Sans Medium" pitchFamily="34" charset="-120"/>
+              </a:rPr>
+              <a:t>Доработка GUI</a:t>
+            </a:r>
+            <a:endParaRPr lang="en-US" sz="1800" dirty="0"/>
+          </a:p>
+        </p:txBody>
+      </p:sp>
+      <p:sp>
+        <p:nvSpPr>
+          <p:cNvPr id="7" name="Text 4"/>
+          <p:cNvSpPr/>
+          <p:nvPr/>
+        </p:nvSpPr>
+        <p:spPr>
+          <a:xfrm>
+            <a:off x="1654493" y="2048589"/>
+            <a:ext cx="12024836" cy="267414"/>
+          </a:xfrm>
+          <a:prstGeom prst="rect">
+            <a:avLst/>
+          </a:prstGeom>
+          <a:noFill/>
+          <a:ln/>
+        </p:spPr>
+        <p:txBody>
+          <a:bodyPr wrap="none" lIns="0" tIns="0" rIns="0" bIns="0" rtlCol="0" anchor="t"/>
+          <a:lstStyle/>
+          <a:p>
+            <a:pPr marL="0" indent="0" algn="l">
+              <a:lnSpc>
+                <a:spcPts val="2100"/>
+              </a:lnSpc>
+              <a:buNone/>
+            </a:pPr>
+            <a:r>
+              <a:rPr lang="en-US" sz="1450" dirty="0">
+                <a:solidFill>
+                  <a:srgbClr val="D4D4D1"/>
+                </a:solidFill>
+                <a:latin typeface="Roboto" pitchFamily="34" charset="0"/>
+                <a:ea typeface="Roboto" pitchFamily="34" charset="-122"/>
+                <a:cs typeface="Roboto" pitchFamily="34" charset="-120"/>
+              </a:rPr>
+              <a:t>Создание более привлекательного и функционального интерфейса с улучшенным пользовательским опытом</a:t>
+            </a:r>
+            <a:endParaRPr lang="en-US" sz="1450" dirty="0"/>
+          </a:p>
+        </p:txBody>
+      </p:sp>
+      <p:sp>
+        <p:nvSpPr>
+          <p:cNvPr id="8" name="Shape 5"/>
+          <p:cNvSpPr/>
+          <p:nvPr/>
+        </p:nvSpPr>
+        <p:spPr>
+          <a:xfrm>
+            <a:off x="1412200" y="3019425"/>
+            <a:ext cx="184428" cy="829985"/>
+          </a:xfrm>
+          <a:prstGeom prst="roundRect">
+            <a:avLst>
+              <a:gd name="adj" fmla="val 15003"/>
+            </a:avLst>
+          </a:prstGeom>
+          <a:solidFill>
+            <a:srgbClr val="484B51"/>
+          </a:solidFill>
+          <a:ln/>
+        </p:spPr>
+        <p:txBody>
+          <a:bodyPr/>
+          <a:lstStyle/>
+          <a:p>
+            <a:endParaRPr lang="ru-RU"/>
+          </a:p>
+        </p:txBody>
+      </p:sp>
+      <p:sp>
+        <p:nvSpPr>
+          <p:cNvPr id="9" name="Shape 6"/>
+          <p:cNvSpPr/>
+          <p:nvPr/>
+        </p:nvSpPr>
+        <p:spPr>
+          <a:xfrm>
+            <a:off x="1227773" y="2898338"/>
+            <a:ext cx="553403" cy="553403"/>
+          </a:xfrm>
+          <a:prstGeom prst="roundRect">
+            <a:avLst>
+              <a:gd name="adj" fmla="val 82616"/>
+            </a:avLst>
+          </a:prstGeom>
+          <a:solidFill>
+            <a:srgbClr val="484B51"/>
+          </a:solidFill>
+          <a:ln/>
+        </p:spPr>
+        <p:txBody>
+          <a:bodyPr/>
+          <a:lstStyle/>
+          <a:p>
+            <a:endParaRPr lang="ru-RU"/>
+          </a:p>
+        </p:txBody>
+      </p:sp>
+      <p:pic>
+        <p:nvPicPr>
+          <p:cNvPr id="10" name="Image 1" descr="preencoded.png"/>
+          <p:cNvPicPr>
+            <a:picLocks noChangeAspect="1"/>
+          </p:cNvPicPr>
+          <p:nvPr/>
+        </p:nvPicPr>
+        <p:blipFill>
+          <a:blip>
             <a:extLst>
               <a:ext uri="{96DAC541-7B7A-43D3-8B79-37D633B846F1}">
                 <asvg:svgBlip xmlns:asvg="http://schemas.microsoft.com/office/drawing/2016/SVG/main" r:embed="rId4"/>
@@ -7089,7 +7950,7 @@
         </p:blipFill>
         <p:spPr>
           <a:xfrm>
-            <a:off x="1089422" y="1779865"/>
+            <a:off x="1366123" y="3036689"/>
             <a:ext cx="276701" cy="276701"/>
           </a:xfrm>
           <a:prstGeom prst="rect">
@@ -7099,14 +7960,14 @@
       </p:pic>
       <p:sp>
         <p:nvSpPr>
-          <p:cNvPr id="6" name="Text 3"/>
-          <p:cNvSpPr/>
-          <p:nvPr/>
-        </p:nvSpPr>
-        <p:spPr>
-          <a:xfrm>
-            <a:off x="1654493" y="1670328"/>
-            <a:ext cx="2305764" cy="288250"/>
+          <p:cNvPr id="11" name="Text 7"/>
+          <p:cNvSpPr/>
+          <p:nvPr/>
+        </p:nvSpPr>
+        <p:spPr>
+          <a:xfrm>
+            <a:off x="1931194" y="2927152"/>
+            <a:ext cx="2732961" cy="288250"/>
           </a:xfrm>
           <a:prstGeom prst="rect">
             <a:avLst/>
@@ -7133,7 +7994,7 @@
                 <a:ea typeface="IBM Plex Sans Medium" pitchFamily="34" charset="-122"/>
                 <a:cs typeface="IBM Plex Sans Medium" pitchFamily="34" charset="-120"/>
               </a:rPr>
-              <a:t>Доработка GUI</a:t>
+              <a:t>Расширение алгоритмов</a:t>
             </a:r>
             <a:endParaRPr lang="en-US" sz="1800" dirty="0"/>
           </a:p>
@@ -7141,14 +8002,14 @@
       </p:sp>
       <p:sp>
         <p:nvSpPr>
-          <p:cNvPr id="7" name="Text 4"/>
-          <p:cNvSpPr/>
-          <p:nvPr/>
-        </p:nvSpPr>
-        <p:spPr>
-          <a:xfrm>
-            <a:off x="1654493" y="2048589"/>
-            <a:ext cx="12024836" cy="267414"/>
+          <p:cNvPr id="12" name="Text 8"/>
+          <p:cNvSpPr/>
+          <p:nvPr/>
+        </p:nvSpPr>
+        <p:spPr>
+          <a:xfrm>
+            <a:off x="1931194" y="3305413"/>
+            <a:ext cx="11748135" cy="267414"/>
           </a:xfrm>
           <a:prstGeom prst="rect">
             <a:avLst/>
@@ -7175,7 +8036,7 @@
                 <a:ea typeface="Roboto" pitchFamily="34" charset="-122"/>
                 <a:cs typeface="Roboto" pitchFamily="34" charset="-120"/>
               </a:rPr>
-              <a:t>Создание более привлекательного и функционального интерфейса с улучшенным пользовательским опытом</a:t>
+              <a:t>Добавление поддержки других методов шифрования: AES, XOR с разными ключами, более сложные схемы</a:t>
             </a:r>
             <a:endParaRPr lang="en-US" sz="1450" dirty="0"/>
           </a:p>
@@ -7183,13 +8044,13 @@
       </p:sp>
       <p:sp>
         <p:nvSpPr>
-          <p:cNvPr id="8" name="Shape 5"/>
-          <p:cNvSpPr/>
-          <p:nvPr/>
-        </p:nvSpPr>
-        <p:spPr>
-          <a:xfrm>
-            <a:off x="1412200" y="3019425"/>
+          <p:cNvPr id="13" name="Shape 9"/>
+          <p:cNvSpPr/>
+          <p:nvPr/>
+        </p:nvSpPr>
+        <p:spPr>
+          <a:xfrm>
+            <a:off x="1688902" y="4276249"/>
             <a:ext cx="184428" cy="829985"/>
           </a:xfrm>
           <a:prstGeom prst="roundRect">
@@ -7202,16 +8063,23 @@
           </a:solidFill>
           <a:ln/>
         </p:spPr>
-      </p:sp>
-      <p:sp>
-        <p:nvSpPr>
-          <p:cNvPr id="9" name="Shape 6"/>
-          <p:cNvSpPr/>
-          <p:nvPr/>
-        </p:nvSpPr>
-        <p:spPr>
-          <a:xfrm>
-            <a:off x="1227773" y="2898338"/>
+        <p:txBody>
+          <a:bodyPr/>
+          <a:lstStyle/>
+          <a:p>
+            <a:endParaRPr lang="ru-RU"/>
+          </a:p>
+        </p:txBody>
+      </p:sp>
+      <p:sp>
+        <p:nvSpPr>
+          <p:cNvPr id="14" name="Shape 10"/>
+          <p:cNvSpPr/>
+          <p:nvPr/>
+        </p:nvSpPr>
+        <p:spPr>
+          <a:xfrm>
+            <a:off x="1504474" y="4155162"/>
             <a:ext cx="553403" cy="553403"/>
           </a:xfrm>
           <a:prstGeom prst="roundRect">
@@ -7224,17 +8092,24 @@
           </a:solidFill>
           <a:ln/>
         </p:spPr>
+        <p:txBody>
+          <a:bodyPr/>
+          <a:lstStyle/>
+          <a:p>
+            <a:endParaRPr lang="ru-RU"/>
+          </a:p>
+        </p:txBody>
       </p:sp>
       <p:pic>
         <p:nvPicPr>
-          <p:cNvPr id="10" name="Image 1" descr="preencoded.png"/>
+          <p:cNvPr id="15" name="Image 2" descr="preencoded.png"/>
           <p:cNvPicPr>
             <a:picLocks noChangeAspect="1"/>
           </p:cNvPicPr>
           <p:nvPr/>
         </p:nvPicPr>
         <p:blipFill>
-          <a:blip r:embed="rId3">
+          <a:blip>
             <a:extLst>
               <a:ext uri="{96DAC541-7B7A-43D3-8B79-37D633B846F1}">
                 <asvg:svgBlip xmlns:asvg="http://schemas.microsoft.com/office/drawing/2016/SVG/main" r:embed="rId5"/>
@@ -7247,7 +8122,7 @@
         </p:blipFill>
         <p:spPr>
           <a:xfrm>
-            <a:off x="1366123" y="3036689"/>
+            <a:off x="1642824" y="4293513"/>
             <a:ext cx="276701" cy="276701"/>
           </a:xfrm>
           <a:prstGeom prst="rect">
@@ -7257,14 +8132,14 @@
       </p:pic>
       <p:sp>
         <p:nvSpPr>
-          <p:cNvPr id="11" name="Text 7"/>
-          <p:cNvSpPr/>
-          <p:nvPr/>
-        </p:nvSpPr>
-        <p:spPr>
-          <a:xfrm>
-            <a:off x="1931194" y="2927152"/>
-            <a:ext cx="2732961" cy="288250"/>
+          <p:cNvPr id="16" name="Text 11"/>
+          <p:cNvSpPr/>
+          <p:nvPr/>
+        </p:nvSpPr>
+        <p:spPr>
+          <a:xfrm>
+            <a:off x="2207895" y="4183975"/>
+            <a:ext cx="2305764" cy="288250"/>
           </a:xfrm>
           <a:prstGeom prst="rect">
             <a:avLst/>
@@ -7291,7 +8166,7 @@
                 <a:ea typeface="IBM Plex Sans Medium" pitchFamily="34" charset="-122"/>
                 <a:cs typeface="IBM Plex Sans Medium" pitchFamily="34" charset="-120"/>
               </a:rPr>
-              <a:t>Расширение алгоритмов</a:t>
+              <a:t>Пакетная обработка</a:t>
             </a:r>
             <a:endParaRPr lang="en-US" sz="1800" dirty="0"/>
           </a:p>
@@ -7299,14 +8174,14 @@
       </p:sp>
       <p:sp>
         <p:nvSpPr>
-          <p:cNvPr id="12" name="Text 8"/>
-          <p:cNvSpPr/>
-          <p:nvPr/>
-        </p:nvSpPr>
-        <p:spPr>
-          <a:xfrm>
-            <a:off x="1931194" y="3305413"/>
-            <a:ext cx="11748135" cy="267414"/>
+          <p:cNvPr id="17" name="Text 12"/>
+          <p:cNvSpPr/>
+          <p:nvPr/>
+        </p:nvSpPr>
+        <p:spPr>
+          <a:xfrm>
+            <a:off x="2207895" y="4562237"/>
+            <a:ext cx="11471434" cy="267414"/>
           </a:xfrm>
           <a:prstGeom prst="rect">
             <a:avLst/>
@@ -7333,7 +8208,7 @@
                 <a:ea typeface="Roboto" pitchFamily="34" charset="-122"/>
                 <a:cs typeface="Roboto" pitchFamily="34" charset="-120"/>
               </a:rPr>
-              <a:t>Добавление поддержки других методов шифрования: AES, XOR с разными ключами, более сложные схемы</a:t>
+              <a:t>Возможность шифровать и дешифровать сразу несколько изображений одновременно</a:t>
             </a:r>
             <a:endParaRPr lang="en-US" sz="1450" dirty="0"/>
           </a:p>
@@ -7341,13 +8216,13 @@
       </p:sp>
       <p:sp>
         <p:nvSpPr>
-          <p:cNvPr id="13" name="Shape 9"/>
-          <p:cNvSpPr/>
-          <p:nvPr/>
-        </p:nvSpPr>
-        <p:spPr>
-          <a:xfrm>
-            <a:off x="1688902" y="4276249"/>
+          <p:cNvPr id="18" name="Shape 13"/>
+          <p:cNvSpPr/>
+          <p:nvPr/>
+        </p:nvSpPr>
+        <p:spPr>
+          <a:xfrm>
+            <a:off x="1965603" y="5533072"/>
             <a:ext cx="184428" cy="829985"/>
           </a:xfrm>
           <a:prstGeom prst="roundRect">
@@ -7360,16 +8235,23 @@
           </a:solidFill>
           <a:ln/>
         </p:spPr>
-      </p:sp>
-      <p:sp>
-        <p:nvSpPr>
-          <p:cNvPr id="14" name="Shape 10"/>
-          <p:cNvSpPr/>
-          <p:nvPr/>
-        </p:nvSpPr>
-        <p:spPr>
-          <a:xfrm>
-            <a:off x="1504474" y="4155162"/>
+        <p:txBody>
+          <a:bodyPr/>
+          <a:lstStyle/>
+          <a:p>
+            <a:endParaRPr lang="ru-RU"/>
+          </a:p>
+        </p:txBody>
+      </p:sp>
+      <p:sp>
+        <p:nvSpPr>
+          <p:cNvPr id="19" name="Shape 14"/>
+          <p:cNvSpPr/>
+          <p:nvPr/>
+        </p:nvSpPr>
+        <p:spPr>
+          <a:xfrm>
+            <a:off x="1781175" y="5411986"/>
             <a:ext cx="553403" cy="553403"/>
           </a:xfrm>
           <a:prstGeom prst="roundRect">
@@ -7382,17 +8264,24 @@
           </a:solidFill>
           <a:ln/>
         </p:spPr>
+        <p:txBody>
+          <a:bodyPr/>
+          <a:lstStyle/>
+          <a:p>
+            <a:endParaRPr lang="ru-RU"/>
+          </a:p>
+        </p:txBody>
       </p:sp>
       <p:pic>
         <p:nvPicPr>
-          <p:cNvPr id="15" name="Image 2" descr="preencoded.png"/>
+          <p:cNvPr id="20" name="Image 3" descr="preencoded.png"/>
           <p:cNvPicPr>
             <a:picLocks noChangeAspect="1"/>
           </p:cNvPicPr>
           <p:nvPr/>
         </p:nvPicPr>
         <p:blipFill>
-          <a:blip r:embed="rId3">
+          <a:blip>
             <a:extLst>
               <a:ext uri="{96DAC541-7B7A-43D3-8B79-37D633B846F1}">
                 <asvg:svgBlip xmlns:asvg="http://schemas.microsoft.com/office/drawing/2016/SVG/main" r:embed="rId6"/>
@@ -7405,7 +8294,7 @@
         </p:blipFill>
         <p:spPr>
           <a:xfrm>
-            <a:off x="1642824" y="4293513"/>
+            <a:off x="1919526" y="5550337"/>
             <a:ext cx="276701" cy="276701"/>
           </a:xfrm>
           <a:prstGeom prst="rect">
@@ -7415,14 +8304,14 @@
       </p:pic>
       <p:sp>
         <p:nvSpPr>
-          <p:cNvPr id="16" name="Text 11"/>
-          <p:cNvSpPr/>
-          <p:nvPr/>
-        </p:nvSpPr>
-        <p:spPr>
-          <a:xfrm>
-            <a:off x="2207895" y="4183975"/>
-            <a:ext cx="2305764" cy="288250"/>
+          <p:cNvPr id="21" name="Text 15"/>
+          <p:cNvSpPr/>
+          <p:nvPr/>
+        </p:nvSpPr>
+        <p:spPr>
+          <a:xfrm>
+            <a:off x="2484596" y="5440799"/>
+            <a:ext cx="2409706" cy="288250"/>
           </a:xfrm>
           <a:prstGeom prst="rect">
             <a:avLst/>
@@ -7449,7 +8338,7 @@
                 <a:ea typeface="IBM Plex Sans Medium" pitchFamily="34" charset="-122"/>
                 <a:cs typeface="IBM Plex Sans Medium" pitchFamily="34" charset="-120"/>
               </a:rPr>
-              <a:t>Пакетная обработка</a:t>
+              <a:t>Облачная интеграция</a:t>
             </a:r>
             <a:endParaRPr lang="en-US" sz="1800" dirty="0"/>
           </a:p>
@@ -7457,14 +8346,14 @@
       </p:sp>
       <p:sp>
         <p:nvSpPr>
-          <p:cNvPr id="17" name="Text 12"/>
-          <p:cNvSpPr/>
-          <p:nvPr/>
-        </p:nvSpPr>
-        <p:spPr>
-          <a:xfrm>
-            <a:off x="2207895" y="4562237"/>
-            <a:ext cx="11471434" cy="267414"/>
+          <p:cNvPr id="22" name="Text 16"/>
+          <p:cNvSpPr/>
+          <p:nvPr/>
+        </p:nvSpPr>
+        <p:spPr>
+          <a:xfrm>
+            <a:off x="2484596" y="5819061"/>
+            <a:ext cx="11194733" cy="267414"/>
           </a:xfrm>
           <a:prstGeom prst="rect">
             <a:avLst/>
@@ -7491,7 +8380,7 @@
                 <a:ea typeface="Roboto" pitchFamily="34" charset="-122"/>
                 <a:cs typeface="Roboto" pitchFamily="34" charset="-120"/>
               </a:rPr>
-              <a:t>Возможность шифровать и дешифровать сразу несколько изображений одновременно</a:t>
+              <a:t>Синхронизация с облачными хранилищами для удобного доступа и защиты</a:t>
             </a:r>
             <a:endParaRPr lang="en-US" sz="1450" dirty="0"/>
           </a:p>
@@ -7499,13 +8388,13 @@
       </p:sp>
       <p:sp>
         <p:nvSpPr>
-          <p:cNvPr id="18" name="Shape 13"/>
-          <p:cNvSpPr/>
-          <p:nvPr/>
-        </p:nvSpPr>
-        <p:spPr>
-          <a:xfrm>
-            <a:off x="1965603" y="5533072"/>
+          <p:cNvPr id="23" name="Shape 17"/>
+          <p:cNvSpPr/>
+          <p:nvPr/>
+        </p:nvSpPr>
+        <p:spPr>
+          <a:xfrm>
+            <a:off x="1688902" y="6789896"/>
             <a:ext cx="184428" cy="829985"/>
           </a:xfrm>
           <a:prstGeom prst="roundRect">
@@ -7518,16 +8407,23 @@
           </a:solidFill>
           <a:ln/>
         </p:spPr>
-      </p:sp>
-      <p:sp>
-        <p:nvSpPr>
-          <p:cNvPr id="19" name="Shape 14"/>
-          <p:cNvSpPr/>
-          <p:nvPr/>
-        </p:nvSpPr>
-        <p:spPr>
-          <a:xfrm>
-            <a:off x="1781175" y="5411986"/>
+        <p:txBody>
+          <a:bodyPr/>
+          <a:lstStyle/>
+          <a:p>
+            <a:endParaRPr lang="ru-RU"/>
+          </a:p>
+        </p:txBody>
+      </p:sp>
+      <p:sp>
+        <p:nvSpPr>
+          <p:cNvPr id="24" name="Shape 18"/>
+          <p:cNvSpPr/>
+          <p:nvPr/>
+        </p:nvSpPr>
+        <p:spPr>
+          <a:xfrm>
+            <a:off x="1504474" y="6668810"/>
             <a:ext cx="553403" cy="553403"/>
           </a:xfrm>
           <a:prstGeom prst="roundRect">
@@ -7540,17 +8436,24 @@
           </a:solidFill>
           <a:ln/>
         </p:spPr>
+        <p:txBody>
+          <a:bodyPr/>
+          <a:lstStyle/>
+          <a:p>
+            <a:endParaRPr lang="ru-RU"/>
+          </a:p>
+        </p:txBody>
       </p:sp>
       <p:pic>
         <p:nvPicPr>
-          <p:cNvPr id="20" name="Image 3" descr="preencoded.png"/>
+          <p:cNvPr id="25" name="Image 4" descr="preencoded.png"/>
           <p:cNvPicPr>
             <a:picLocks noChangeAspect="1"/>
           </p:cNvPicPr>
           <p:nvPr/>
         </p:nvPicPr>
         <p:blipFill>
-          <a:blip r:embed="rId3">
+          <a:blip>
             <a:extLst>
               <a:ext uri="{96DAC541-7B7A-43D3-8B79-37D633B846F1}">
                 <asvg:svgBlip xmlns:asvg="http://schemas.microsoft.com/office/drawing/2016/SVG/main" r:embed="rId7"/>
@@ -7563,7 +8466,7 @@
         </p:blipFill>
         <p:spPr>
           <a:xfrm>
-            <a:off x="1919526" y="5550337"/>
+            <a:off x="1642824" y="6807160"/>
             <a:ext cx="276701" cy="276701"/>
           </a:xfrm>
           <a:prstGeom prst="rect">
@@ -7573,14 +8476,14 @@
       </p:pic>
       <p:sp>
         <p:nvSpPr>
-          <p:cNvPr id="21" name="Text 15"/>
-          <p:cNvSpPr/>
-          <p:nvPr/>
-        </p:nvSpPr>
-        <p:spPr>
-          <a:xfrm>
-            <a:off x="2484596" y="5440799"/>
-            <a:ext cx="2409706" cy="288250"/>
+          <p:cNvPr id="26" name="Text 19"/>
+          <p:cNvSpPr/>
+          <p:nvPr/>
+        </p:nvSpPr>
+        <p:spPr>
+          <a:xfrm>
+            <a:off x="2207895" y="6697623"/>
+            <a:ext cx="2305764" cy="288250"/>
           </a:xfrm>
           <a:prstGeom prst="rect">
             <a:avLst/>
@@ -7607,7 +8510,7 @@
                 <a:ea typeface="IBM Plex Sans Medium" pitchFamily="34" charset="-122"/>
                 <a:cs typeface="IBM Plex Sans Medium" pitchFamily="34" charset="-120"/>
               </a:rPr>
-              <a:t>Облачная интеграция</a:t>
+              <a:t>Маркетинг</a:t>
             </a:r>
             <a:endParaRPr lang="en-US" sz="1800" dirty="0"/>
           </a:p>
@@ -7615,14 +8518,14 @@
       </p:sp>
       <p:sp>
         <p:nvSpPr>
-          <p:cNvPr id="22" name="Text 16"/>
-          <p:cNvSpPr/>
-          <p:nvPr/>
-        </p:nvSpPr>
-        <p:spPr>
-          <a:xfrm>
-            <a:off x="2484596" y="5819061"/>
-            <a:ext cx="11194733" cy="267414"/>
+          <p:cNvPr id="27" name="Text 20"/>
+          <p:cNvSpPr/>
+          <p:nvPr/>
+        </p:nvSpPr>
+        <p:spPr>
+          <a:xfrm>
+            <a:off x="2207895" y="7075884"/>
+            <a:ext cx="11471434" cy="267414"/>
           </a:xfrm>
           <a:prstGeom prst="rect">
             <a:avLst/>
@@ -7649,7 +8552,7 @@
                 <a:ea typeface="Roboto" pitchFamily="34" charset="-122"/>
                 <a:cs typeface="Roboto" pitchFamily="34" charset="-120"/>
               </a:rPr>
-              <a:t>Синхронизация с облачными хранилищами для удобного доступа и защиты</a:t>
+              <a:t>Создание лендинга, продвижение в социальных сетях, сотрудничество с фото-сообществами</a:t>
             </a:r>
             <a:endParaRPr lang="en-US" sz="1450" dirty="0"/>
           </a:p>
@@ -7657,159 +8560,55 @@
       </p:sp>
       <p:sp>
         <p:nvSpPr>
-          <p:cNvPr id="23" name="Shape 17"/>
-          <p:cNvSpPr/>
-          <p:nvPr/>
-        </p:nvSpPr>
-        <p:spPr>
-          <a:xfrm>
-            <a:off x="1688902" y="6789896"/>
-            <a:ext cx="184428" cy="829985"/>
-          </a:xfrm>
-          <a:prstGeom prst="roundRect">
-            <a:avLst>
-              <a:gd name="adj" fmla="val 15003"/>
-            </a:avLst>
-          </a:prstGeom>
-          <a:solidFill>
-            <a:srgbClr val="484B51"/>
-          </a:solidFill>
-          <a:ln/>
-        </p:spPr>
-      </p:sp>
-      <p:sp>
-        <p:nvSpPr>
-          <p:cNvPr id="24" name="Shape 18"/>
-          <p:cNvSpPr/>
-          <p:nvPr/>
-        </p:nvSpPr>
-        <p:spPr>
-          <a:xfrm>
-            <a:off x="1504474" y="6668810"/>
-            <a:ext cx="553403" cy="553403"/>
-          </a:xfrm>
-          <a:prstGeom prst="roundRect">
-            <a:avLst>
-              <a:gd name="adj" fmla="val 82616"/>
-            </a:avLst>
-          </a:prstGeom>
-          <a:solidFill>
-            <a:srgbClr val="484B51"/>
-          </a:solidFill>
-          <a:ln/>
-        </p:spPr>
-      </p:sp>
-      <p:pic>
-        <p:nvPicPr>
-          <p:cNvPr id="25" name="Image 4" descr="preencoded.png"/>
-          <p:cNvPicPr>
-            <a:picLocks noChangeAspect="1"/>
-          </p:cNvPicPr>
-          <p:nvPr/>
-        </p:nvPicPr>
-        <p:blipFill>
-          <a:blip r:embed="rId3">
+          <p:cNvPr id="28" name="Прямоугольник 27">
             <a:extLst>
-              <a:ext uri="{96DAC541-7B7A-43D3-8B79-37D633B846F1}">
-                <asvg:svgBlip xmlns:asvg="http://schemas.microsoft.com/office/drawing/2016/SVG/main" r:embed="rId8"/>
+              <a:ext uri="{FF2B5EF4-FFF2-40B4-BE49-F238E27FC236}">
+                <a16:creationId xmlns:a16="http://schemas.microsoft.com/office/drawing/2014/main" id="{7159302E-9E49-CC19-5F74-8F597BCA92AB}"/>
               </a:ext>
             </a:extLst>
-          </a:blip>
-          <a:stretch>
-            <a:fillRect/>
-          </a:stretch>
-        </p:blipFill>
-        <p:spPr>
-          <a:xfrm>
-            <a:off x="1642824" y="6807160"/>
-            <a:ext cx="276701" cy="276701"/>
-          </a:xfrm>
-          <a:prstGeom prst="rect">
-            <a:avLst/>
-          </a:prstGeom>
-        </p:spPr>
-      </p:pic>
-      <p:sp>
-        <p:nvSpPr>
-          <p:cNvPr id="26" name="Text 19"/>
-          <p:cNvSpPr/>
-          <p:nvPr/>
-        </p:nvSpPr>
-        <p:spPr>
-          <a:xfrm>
-            <a:off x="2207895" y="6697623"/>
-            <a:ext cx="2305764" cy="288250"/>
-          </a:xfrm>
-          <a:prstGeom prst="rect">
-            <a:avLst/>
-          </a:prstGeom>
-          <a:noFill/>
-          <a:ln/>
-        </p:spPr>
-        <p:txBody>
-          <a:bodyPr wrap="none" lIns="0" tIns="0" rIns="0" bIns="0" rtlCol="0" anchor="t"/>
-          <a:lstStyle/>
-          <a:p>
-            <a:pPr marL="0" indent="0" algn="l">
-              <a:lnSpc>
-                <a:spcPts val="2250"/>
-              </a:lnSpc>
-              <a:buNone/>
-            </a:pPr>
-            <a:r>
-              <a:rPr lang="en-US" sz="1800" dirty="0">
-                <a:solidFill>
-                  <a:srgbClr val="D4D4D1"/>
-                </a:solidFill>
-                <a:latin typeface="IBM Plex Sans Medium" pitchFamily="34" charset="0"/>
-                <a:ea typeface="IBM Plex Sans Medium" pitchFamily="34" charset="-122"/>
-                <a:cs typeface="IBM Plex Sans Medium" pitchFamily="34" charset="-120"/>
-              </a:rPr>
-              <a:t>Маркетинг</a:t>
-            </a:r>
-            <a:endParaRPr lang="en-US" sz="1800" dirty="0"/>
-          </a:p>
-        </p:txBody>
-      </p:sp>
-      <p:sp>
-        <p:nvSpPr>
-          <p:cNvPr id="27" name="Text 20"/>
-          <p:cNvSpPr/>
-          <p:nvPr/>
-        </p:nvSpPr>
-        <p:spPr>
-          <a:xfrm>
-            <a:off x="2207895" y="7075884"/>
-            <a:ext cx="11471434" cy="267414"/>
-          </a:xfrm>
-          <a:prstGeom prst="rect">
-            <a:avLst/>
-          </a:prstGeom>
-          <a:noFill/>
-          <a:ln/>
-        </p:spPr>
-        <p:txBody>
-          <a:bodyPr wrap="none" lIns="0" tIns="0" rIns="0" bIns="0" rtlCol="0" anchor="t"/>
-          <a:lstStyle/>
-          <a:p>
-            <a:pPr marL="0" indent="0" algn="l">
-              <a:lnSpc>
-                <a:spcPts val="2100"/>
-              </a:lnSpc>
-              <a:buNone/>
-            </a:pPr>
-            <a:r>
-              <a:rPr lang="en-US" sz="1450" dirty="0">
-                <a:solidFill>
-                  <a:srgbClr val="D4D4D1"/>
-                </a:solidFill>
-                <a:latin typeface="Roboto" pitchFamily="34" charset="0"/>
-                <a:ea typeface="Roboto" pitchFamily="34" charset="-122"/>
-                <a:cs typeface="Roboto" pitchFamily="34" charset="-120"/>
-              </a:rPr>
-              <a:t>Создание лендинга, продвижение в социальных сетях, сотрудничество с фото-сообществами</a:t>
-            </a:r>
-            <a:endParaRPr lang="en-US" sz="1450" dirty="0"/>
+          </p:cNvPr>
+          <p:cNvSpPr/>
+          <p:nvPr/>
+        </p:nvSpPr>
+        <p:spPr>
+          <a:xfrm>
+            <a:off x="12827924" y="7731236"/>
+            <a:ext cx="1677785" cy="466758"/>
+          </a:xfrm>
+          <a:prstGeom prst="rect">
+            <a:avLst/>
+          </a:prstGeom>
+          <a:solidFill>
+            <a:srgbClr val="292C32"/>
+          </a:solidFill>
+          <a:ln>
+            <a:solidFill>
+              <a:srgbClr val="292C32"/>
+            </a:solidFill>
+          </a:ln>
+        </p:spPr>
+        <p:style>
+          <a:lnRef idx="2">
+            <a:schemeClr val="accent1">
+              <a:shade val="15000"/>
+            </a:schemeClr>
+          </a:lnRef>
+          <a:fillRef idx="1">
+            <a:schemeClr val="accent1"/>
+          </a:fillRef>
+          <a:effectRef idx="0">
+            <a:schemeClr val="accent1"/>
+          </a:effectRef>
+          <a:fontRef idx="minor">
+            <a:schemeClr val="lt1"/>
+          </a:fontRef>
+        </p:style>
+        <p:txBody>
+          <a:bodyPr rtlCol="0" anchor="ctr"/>
+          <a:lstStyle/>
+          <a:p>
+            <a:pPr algn="ctr"/>
+            <a:endParaRPr lang="ru-RU"/>
           </a:p>
         </p:txBody>
       </p:sp>
